--- a/skills/presentation-template-library/skills/artifact-template-lake-research-journal/assets/reference.pptx
+++ b/skills/presentation-template-library/skills/artifact-template-lake-research-journal/assets/reference.pptx
@@ -4198,7 +4198,7 @@
         </p:xfrm>
         <a:graphic xmlns:a="http://schemas.openxmlformats.org/drawingml/2006/main">
           <a:graphicData uri="http://schemas.openxmlformats.org/drawingml/2006/chart">
-            <c:chart xmlns:r="http://schemas.openxmlformats.org/officeDocument/2006/relationships" xmlns:c="http://schemas.openxmlformats.org/drawingml/2006/chart" r:id="R5c7e4c11c5e540a3"/>
+            <c:chart xmlns:r="http://schemas.openxmlformats.org/officeDocument/2006/relationships" xmlns:c="http://schemas.openxmlformats.org/drawingml/2006/chart" r:id="R880900df9510453f"/>
           </a:graphicData>
         </a:graphic>
       </p:graphicFrame>
@@ -4216,7 +4216,7 @@
         </p:xfrm>
         <a:graphic xmlns:a="http://schemas.openxmlformats.org/drawingml/2006/main">
           <a:graphicData uri="http://schemas.openxmlformats.org/drawingml/2006/chart">
-            <c:chart xmlns:r="http://schemas.openxmlformats.org/officeDocument/2006/relationships" xmlns:c="http://schemas.openxmlformats.org/drawingml/2006/chart" r:id="R21449fb7cc404e9b"/>
+            <c:chart xmlns:r="http://schemas.openxmlformats.org/officeDocument/2006/relationships" xmlns:c="http://schemas.openxmlformats.org/drawingml/2006/chart" r:id="Re3d4840a9ab94f73"/>
           </a:graphicData>
         </a:graphic>
       </p:graphicFrame>

--- a/skills/presentation-template-library/skills/artifact-template-lake-research-journal/assets/reference.pptx
+++ b/skills/presentation-template-library/skills/artifact-template-lake-research-journal/assets/reference.pptx
@@ -4198,7 +4198,7 @@
         </p:xfrm>
         <a:graphic xmlns:a="http://schemas.openxmlformats.org/drawingml/2006/main">
           <a:graphicData uri="http://schemas.openxmlformats.org/drawingml/2006/chart">
-            <c:chart xmlns:r="http://schemas.openxmlformats.org/officeDocument/2006/relationships" xmlns:c="http://schemas.openxmlformats.org/drawingml/2006/chart" r:id="R880900df9510453f"/>
+            <c:chart xmlns:r="http://schemas.openxmlformats.org/officeDocument/2006/relationships" xmlns:c="http://schemas.openxmlformats.org/drawingml/2006/chart" r:id="R2e415c58f40845a5"/>
           </a:graphicData>
         </a:graphic>
       </p:graphicFrame>
@@ -4216,7 +4216,7 @@
         </p:xfrm>
         <a:graphic xmlns:a="http://schemas.openxmlformats.org/drawingml/2006/main">
           <a:graphicData uri="http://schemas.openxmlformats.org/drawingml/2006/chart">
-            <c:chart xmlns:r="http://schemas.openxmlformats.org/officeDocument/2006/relationships" xmlns:c="http://schemas.openxmlformats.org/drawingml/2006/chart" r:id="Re3d4840a9ab94f73"/>
+            <c:chart xmlns:r="http://schemas.openxmlformats.org/officeDocument/2006/relationships" xmlns:c="http://schemas.openxmlformats.org/drawingml/2006/chart" r:id="R82f4d363e86d4c47"/>
           </a:graphicData>
         </a:graphic>
       </p:graphicFrame>

--- a/skills/presentation-template-library/skills/artifact-template-lake-research-journal/assets/reference.pptx
+++ b/skills/presentation-template-library/skills/artifact-template-lake-research-journal/assets/reference.pptx
@@ -4198,7 +4198,7 @@
         </p:xfrm>
         <a:graphic xmlns:a="http://schemas.openxmlformats.org/drawingml/2006/main">
           <a:graphicData uri="http://schemas.openxmlformats.org/drawingml/2006/chart">
-            <c:chart xmlns:r="http://schemas.openxmlformats.org/officeDocument/2006/relationships" xmlns:c="http://schemas.openxmlformats.org/drawingml/2006/chart" r:id="R2e415c58f40845a5"/>
+            <c:chart xmlns:r="http://schemas.openxmlformats.org/officeDocument/2006/relationships" xmlns:c="http://schemas.openxmlformats.org/drawingml/2006/chart" r:id="R812f35cf26804c05"/>
           </a:graphicData>
         </a:graphic>
       </p:graphicFrame>
@@ -4216,7 +4216,7 @@
         </p:xfrm>
         <a:graphic xmlns:a="http://schemas.openxmlformats.org/drawingml/2006/main">
           <a:graphicData uri="http://schemas.openxmlformats.org/drawingml/2006/chart">
-            <c:chart xmlns:r="http://schemas.openxmlformats.org/officeDocument/2006/relationships" xmlns:c="http://schemas.openxmlformats.org/drawingml/2006/chart" r:id="R82f4d363e86d4c47"/>
+            <c:chart xmlns:r="http://schemas.openxmlformats.org/officeDocument/2006/relationships" xmlns:c="http://schemas.openxmlformats.org/drawingml/2006/chart" r:id="R40f608bb59fd45cc"/>
           </a:graphicData>
         </a:graphic>
       </p:graphicFrame>

--- a/skills/presentation-template-library/skills/artifact-template-lake-research-journal/assets/reference.pptx
+++ b/skills/presentation-template-library/skills/artifact-template-lake-research-journal/assets/reference.pptx
@@ -418,6 +418,16 @@
 <file path=ppt/slides/slide1.xml><?xml version="1.0" encoding="utf-8"?>
 <p:sld xmlns:p="http://schemas.openxmlformats.org/presentationml/2006/main">
   <p:cSld name="Opening proposition">
+    <p:bg>
+      <p:bgPr>
+        <a:blipFill xmlns:a="http://schemas.openxmlformats.org/drawingml/2006/main">
+          <a:blip xmlns:r="http://schemas.openxmlformats.org/officeDocument/2006/relationships" r:embed="rIdOfficeKitImagec2e9a9d799668dd3_1"/>
+          <a:stretch>
+            <a:fillRect/>
+          </a:stretch>
+        </a:blipFill>
+      </p:bgPr>
+    </p:bg>
     <p:spTree>
       <p:nvGrpSpPr>
         <p:cNvPr id="1" name=""/>
@@ -434,7 +444,7 @@
       </p:grpSpPr>
       <p:sp>
         <p:nvSpPr>
-          <p:cNvPr id="2" name="dark-field"/>
+          <p:cNvPr id="2" name="cover-photo-scrim"/>
           <p:cNvSpPr/>
           <p:nvPr/>
         </p:nvSpPr>
@@ -447,7 +457,9 @@
             <a:avLst/>
           </a:prstGeom>
           <a:solidFill xmlns:a="http://schemas.openxmlformats.org/drawingml/2006/main">
-            <a:srgbClr val="173D5C"/>
+            <a:srgbClr val="173D5C">
+              <a:alpha val="58000"/>
+            </a:srgbClr>
           </a:solidFill>
           <a:ln xmlns:a="http://schemas.openxmlformats.org/drawingml/2006/main" w="0">
             <a:solidFill>
@@ -470,7 +482,45 @@
       </p:sp>
       <p:sp>
         <p:nvSpPr>
-          <p:cNvPr id="3" name="cover-evidence-field"/>
+          <p:cNvPr id="3" name="cover-reading-plane"/>
+          <p:cNvSpPr/>
+          <p:nvPr/>
+        </p:nvSpPr>
+        <p:spPr>
+          <a:xfrm xmlns:a="http://schemas.openxmlformats.org/drawingml/2006/main">
+            <a:off x="0" y="0"/>
+            <a:ext cx="8191500" cy="8572500"/>
+          </a:xfrm>
+          <a:prstGeom xmlns:a="http://schemas.openxmlformats.org/drawingml/2006/main" prst="rect">
+            <a:avLst/>
+          </a:prstGeom>
+          <a:solidFill xmlns:a="http://schemas.openxmlformats.org/drawingml/2006/main">
+            <a:srgbClr val="173D5C">
+              <a:alpha val="78000"/>
+            </a:srgbClr>
+          </a:solidFill>
+          <a:ln xmlns:a="http://schemas.openxmlformats.org/drawingml/2006/main" w="0">
+            <a:solidFill>
+              <a:srgbClr val="173D5C"/>
+            </a:solidFill>
+            <a:prstDash val="solid"/>
+          </a:ln>
+        </p:spPr>
+        <p:txBody>
+          <a:bodyPr xmlns:a="http://schemas.openxmlformats.org/drawingml/2006/main" wrap="square" lIns="0" tIns="0" rIns="0" bIns="0" anchor="t"/>
+          <a:lstStyle xmlns:a="http://schemas.openxmlformats.org/drawingml/2006/main"/>
+          <a:p xmlns:a="http://schemas.openxmlformats.org/drawingml/2006/main">
+            <a:r>
+              <a:rPr lang="en-US"/>
+              <a:t/>
+            </a:r>
+            <a:endParaRPr lang="en-US"/>
+          </a:p>
+        </p:txBody>
+      </p:sp>
+      <p:sp>
+        <p:nvSpPr>
+          <p:cNvPr id="4" name="cover-evidence-field"/>
           <p:cNvSpPr/>
           <p:nvPr/>
         </p:nvSpPr>
@@ -508,7 +558,7 @@
       </p:sp>
       <p:sp>
         <p:nvSpPr>
-          <p:cNvPr id="4" name="cover-gold-line"/>
+          <p:cNvPr id="5" name="cover-gold-line"/>
           <p:cNvSpPr/>
           <p:nvPr/>
         </p:nvSpPr>
@@ -542,7 +592,7 @@
       </p:sp>
       <p:sp>
         <p:nvSpPr>
-          <p:cNvPr id="5" name="eyebrow"/>
+          <p:cNvPr id="6" name="eyebrow"/>
           <p:cNvSpPr txBox="1"/>
           <p:nvPr/>
         </p:nvSpPr>
@@ -579,7 +629,7 @@
       </p:sp>
       <p:sp>
         <p:nvSpPr>
-          <p:cNvPr id="6" name="cover-date"/>
+          <p:cNvPr id="7" name="cover-date"/>
           <p:cNvSpPr txBox="1"/>
           <p:nvPr/>
         </p:nvSpPr>
@@ -617,7 +667,7 @@
       </p:sp>
       <p:sp>
         <p:nvSpPr>
-          <p:cNvPr id="7" name="cover-title"/>
+          <p:cNvPr id="8" name="cover-title"/>
           <p:cNvSpPr txBox="1"/>
           <p:nvPr/>
         </p:nvSpPr>
@@ -654,7 +704,7 @@
       </p:sp>
       <p:sp>
         <p:nvSpPr>
-          <p:cNvPr id="8" name="cover-subtitle"/>
+          <p:cNvPr id="9" name="cover-subtitle"/>
           <p:cNvSpPr txBox="1"/>
           <p:nvPr/>
         </p:nvSpPr>
@@ -691,7 +741,7 @@
       </p:sp>
       <p:sp>
         <p:nvSpPr>
-          <p:cNvPr id="9" name="cover-thesis"/>
+          <p:cNvPr id="10" name="cover-thesis"/>
           <p:cNvSpPr txBox="1"/>
           <p:nvPr/>
         </p:nvSpPr>
@@ -728,7 +778,7 @@
       </p:sp>
       <p:sp>
         <p:nvSpPr>
-          <p:cNvPr id="10" name="cover-metric-one"/>
+          <p:cNvPr id="11" name="cover-metric-one"/>
           <p:cNvSpPr txBox="1"/>
           <p:nvPr/>
         </p:nvSpPr>
@@ -765,7 +815,7 @@
       </p:sp>
       <p:sp>
         <p:nvSpPr>
-          <p:cNvPr id="11" name="cover-metric-one-caption"/>
+          <p:cNvPr id="12" name="cover-metric-one-caption"/>
           <p:cNvSpPr txBox="1"/>
           <p:nvPr/>
         </p:nvSpPr>
@@ -802,7 +852,7 @@
       </p:sp>
       <p:sp>
         <p:nvSpPr>
-          <p:cNvPr id="12" name="cover-metric-two"/>
+          <p:cNvPr id="13" name="cover-metric-two"/>
           <p:cNvSpPr txBox="1"/>
           <p:nvPr/>
         </p:nvSpPr>
@@ -839,7 +889,7 @@
       </p:sp>
       <p:sp>
         <p:nvSpPr>
-          <p:cNvPr id="13" name="cover-metric-two-caption"/>
+          <p:cNvPr id="14" name="cover-metric-two-caption"/>
           <p:cNvSpPr txBox="1"/>
           <p:nvPr/>
         </p:nvSpPr>
@@ -876,7 +926,7 @@
       </p:sp>
       <p:sp>
         <p:nvSpPr>
-          <p:cNvPr id="14" name="cover-metric-three"/>
+          <p:cNvPr id="15" name="cover-metric-three"/>
           <p:cNvSpPr txBox="1"/>
           <p:nvPr/>
         </p:nvSpPr>
@@ -913,7 +963,7 @@
       </p:sp>
       <p:sp>
         <p:nvSpPr>
-          <p:cNvPr id="15" name="cover-metric-three-caption"/>
+          <p:cNvPr id="16" name="cover-metric-three-caption"/>
           <p:cNvSpPr txBox="1"/>
           <p:nvPr/>
         </p:nvSpPr>
@@ -950,7 +1000,7 @@
       </p:sp>
       <p:sp>
         <p:nvSpPr>
-          <p:cNvPr id="16" name="cover-watermark"/>
+          <p:cNvPr id="17" name="cover-watermark"/>
           <p:cNvSpPr txBox="1"/>
           <p:nvPr/>
         </p:nvSpPr>
@@ -987,7 +1037,7 @@
       </p:sp>
       <p:sp>
         <p:nvSpPr>
-          <p:cNvPr id="17" name="basis-band"/>
+          <p:cNvPr id="18" name="basis-band"/>
           <p:cNvSpPr/>
           <p:nvPr/>
         </p:nvSpPr>
@@ -1025,7 +1075,7 @@
       </p:sp>
       <p:sp>
         <p:nvSpPr>
-          <p:cNvPr id="18" name="basis-band-text"/>
+          <p:cNvPr id="19" name="basis-band-text"/>
           <p:cNvSpPr txBox="1"/>
           <p:nvPr/>
         </p:nvSpPr>
@@ -1062,7 +1112,7 @@
       </p:sp>
       <p:sp>
         <p:nvSpPr>
-          <p:cNvPr id="19" name="page-number"/>
+          <p:cNvPr id="20" name="page-number"/>
           <p:cNvSpPr txBox="1"/>
           <p:nvPr/>
         </p:nvSpPr>
@@ -4198,7 +4248,7 @@
         </p:xfrm>
         <a:graphic xmlns:a="http://schemas.openxmlformats.org/drawingml/2006/main">
           <a:graphicData uri="http://schemas.openxmlformats.org/drawingml/2006/chart">
-            <c:chart xmlns:r="http://schemas.openxmlformats.org/officeDocument/2006/relationships" xmlns:c="http://schemas.openxmlformats.org/drawingml/2006/chart" r:id="R812f35cf26804c05"/>
+            <c:chart xmlns:r="http://schemas.openxmlformats.org/officeDocument/2006/relationships" xmlns:c="http://schemas.openxmlformats.org/drawingml/2006/chart" r:id="R3ceaba2f46014c9c"/>
           </a:graphicData>
         </a:graphic>
       </p:graphicFrame>
@@ -4216,7 +4266,7 @@
         </p:xfrm>
         <a:graphic xmlns:a="http://schemas.openxmlformats.org/drawingml/2006/main">
           <a:graphicData uri="http://schemas.openxmlformats.org/drawingml/2006/chart">
-            <c:chart xmlns:r="http://schemas.openxmlformats.org/officeDocument/2006/relationships" xmlns:c="http://schemas.openxmlformats.org/drawingml/2006/chart" r:id="R40f608bb59fd45cc"/>
+            <c:chart xmlns:r="http://schemas.openxmlformats.org/officeDocument/2006/relationships" xmlns:c="http://schemas.openxmlformats.org/drawingml/2006/chart" r:id="R4cdaa152de234aed"/>
           </a:graphicData>
         </a:graphic>
       </p:graphicFrame>

--- a/skills/presentation-template-library/skills/artifact-template-lake-research-journal/assets/reference.pptx
+++ b/skills/presentation-template-library/skills/artifact-template-lake-research-journal/assets/reference.pptx
@@ -421,7 +421,7 @@
     <p:bg>
       <p:bgPr>
         <a:blipFill xmlns:a="http://schemas.openxmlformats.org/drawingml/2006/main">
-          <a:blip xmlns:r="http://schemas.openxmlformats.org/officeDocument/2006/relationships" r:embed="rIdOfficeKitImagec2e9a9d799668dd3_1"/>
+          <a:blip xmlns:r="http://schemas.openxmlformats.org/officeDocument/2006/relationships" r:embed="rIdOfficeKitImage45ba195e2a5649fb_1"/>
           <a:stretch>
             <a:fillRect/>
           </a:stretch>
@@ -4248,7 +4248,7 @@
         </p:xfrm>
         <a:graphic xmlns:a="http://schemas.openxmlformats.org/drawingml/2006/main">
           <a:graphicData uri="http://schemas.openxmlformats.org/drawingml/2006/chart">
-            <c:chart xmlns:r="http://schemas.openxmlformats.org/officeDocument/2006/relationships" xmlns:c="http://schemas.openxmlformats.org/drawingml/2006/chart" r:id="R3ceaba2f46014c9c"/>
+            <c:chart xmlns:r="http://schemas.openxmlformats.org/officeDocument/2006/relationships" xmlns:c="http://schemas.openxmlformats.org/drawingml/2006/chart" r:id="R8908752b48014310"/>
           </a:graphicData>
         </a:graphic>
       </p:graphicFrame>
@@ -4266,7 +4266,7 @@
         </p:xfrm>
         <a:graphic xmlns:a="http://schemas.openxmlformats.org/drawingml/2006/main">
           <a:graphicData uri="http://schemas.openxmlformats.org/drawingml/2006/chart">
-            <c:chart xmlns:r="http://schemas.openxmlformats.org/officeDocument/2006/relationships" xmlns:c="http://schemas.openxmlformats.org/drawingml/2006/chart" r:id="R4cdaa152de234aed"/>
+            <c:chart xmlns:r="http://schemas.openxmlformats.org/officeDocument/2006/relationships" xmlns:c="http://schemas.openxmlformats.org/drawingml/2006/chart" r:id="R1f2fd0cc8de248b8"/>
           </a:graphicData>
         </a:graphic>
       </p:graphicFrame>

--- a/skills/presentation-template-library/skills/artifact-template-lake-research-journal/assets/reference.pptx
+++ b/skills/presentation-template-library/skills/artifact-template-lake-research-journal/assets/reference.pptx
@@ -4248,7 +4248,7 @@
         </p:xfrm>
         <a:graphic xmlns:a="http://schemas.openxmlformats.org/drawingml/2006/main">
           <a:graphicData uri="http://schemas.openxmlformats.org/drawingml/2006/chart">
-            <c:chart xmlns:r="http://schemas.openxmlformats.org/officeDocument/2006/relationships" xmlns:c="http://schemas.openxmlformats.org/drawingml/2006/chart" r:id="R8908752b48014310"/>
+            <c:chart xmlns:r="http://schemas.openxmlformats.org/officeDocument/2006/relationships" xmlns:c="http://schemas.openxmlformats.org/drawingml/2006/chart" r:id="Rec1dd6fda84045f9"/>
           </a:graphicData>
         </a:graphic>
       </p:graphicFrame>
@@ -4266,7 +4266,7 @@
         </p:xfrm>
         <a:graphic xmlns:a="http://schemas.openxmlformats.org/drawingml/2006/main">
           <a:graphicData uri="http://schemas.openxmlformats.org/drawingml/2006/chart">
-            <c:chart xmlns:r="http://schemas.openxmlformats.org/officeDocument/2006/relationships" xmlns:c="http://schemas.openxmlformats.org/drawingml/2006/chart" r:id="R1f2fd0cc8de248b8"/>
+            <c:chart xmlns:r="http://schemas.openxmlformats.org/officeDocument/2006/relationships" xmlns:c="http://schemas.openxmlformats.org/drawingml/2006/chart" r:id="R6dc00faa937244fd"/>
           </a:graphicData>
         </a:graphic>
       </p:graphicFrame>

--- a/skills/presentation-template-library/skills/artifact-template-lake-research-journal/assets/reference.pptx
+++ b/skills/presentation-template-library/skills/artifact-template-lake-research-journal/assets/reference.pptx
@@ -194,234 +194,13 @@
 </a:theme>
 </file>
 
-<file path=ppt/slides/charts/chart1.xml><?xml version="1.0" encoding="utf-8"?>
-<c:chartSpace xmlns:c="http://schemas.openxmlformats.org/drawingml/2006/chart" xmlns:a="http://schemas.openxmlformats.org/drawingml/2006/main">
-  <c:chart>
-    <c:title>
-      <c:tx>
-        <c:rich>
-          <a:bodyPr/>
-          <a:lstStyle/>
-          <a:p>
-            <a:r>
-              <a:t>Observed signal</a:t>
-            </a:r>
-          </a:p>
-        </c:rich>
-      </c:tx>
-      <c:layout/>
-    </c:title>
-    <c:plotArea>
-      <c:layout/>
-      <c:barChart>
-        <c:barDir val="col"/>
-        <c:grouping val="clustered"/>
-        <c:ser>
-          <c:idx val="0"/>
-          <c:order val="0"/>
-          <c:tx>
-            <c:v>Observed</c:v>
-          </c:tx>
-          <c:spPr>
-            <a:solidFill>
-              <a:srgbClr val="70508F"/>
-            </a:solidFill>
-          </c:spPr>
-          <c:cat>
-            <c:strLit>
-              <c:ptCount val="6"/>
-              <c:pt idx="0">
-                <c:v>A</c:v>
-              </c:pt>
-              <c:pt idx="1">
-                <c:v>B</c:v>
-              </c:pt>
-              <c:pt idx="2">
-                <c:v>C</c:v>
-              </c:pt>
-              <c:pt idx="3">
-                <c:v>D</c:v>
-              </c:pt>
-              <c:pt idx="4">
-                <c:v>E</c:v>
-              </c:pt>
-              <c:pt idx="5">
-                <c:v>F</c:v>
-              </c:pt>
-            </c:strLit>
-          </c:cat>
-          <c:val>
-            <c:numLit>
-              <c:formatCode>General</c:formatCode>
-              <c:ptCount val="6"/>
-              <c:pt idx="0">
-                <c:v>38</c:v>
-              </c:pt>
-              <c:pt idx="1">
-                <c:v>46</c:v>
-              </c:pt>
-              <c:pt idx="2">
-                <c:v>43</c:v>
-              </c:pt>
-              <c:pt idx="3">
-                <c:v>58</c:v>
-              </c:pt>
-              <c:pt idx="4">
-                <c:v>68</c:v>
-              </c:pt>
-              <c:pt idx="5">
-                <c:v>74</c:v>
-              </c:pt>
-            </c:numLit>
-          </c:val>
-        </c:ser>
-        <c:axId val="1"/>
-        <c:axId val="2"/>
-      </c:barChart>
-      <c:catAx>
-        <c:axId val="1"/>
-        <c:scaling>
-          <c:orientation val="minMax"/>
-        </c:scaling>
-        <c:axPos val="b"/>
-        <c:crossAx val="2"/>
-      </c:catAx>
-      <c:valAx>
-        <c:axId val="2"/>
-        <c:scaling>
-          <c:orientation val="minMax"/>
-        </c:scaling>
-        <c:axPos val="l"/>
-        <c:crossAx val="1"/>
-      </c:valAx>
-    </c:plotArea>
-    <c:plotVisOnly val="1"/>
-  </c:chart>
-</c:chartSpace>
-</file>
-
-<file path=ppt/slides/charts/chart2.xml><?xml version="1.0" encoding="utf-8"?>
-<c:chartSpace xmlns:c="http://schemas.openxmlformats.org/drawingml/2006/chart" xmlns:a="http://schemas.openxmlformats.org/drawingml/2006/main">
-  <c:chart>
-    <c:title>
-      <c:tx>
-        <c:rich>
-          <a:bodyPr/>
-          <a:lstStyle/>
-          <a:p>
-            <a:r>
-              <a:t>Context</a:t>
-            </a:r>
-          </a:p>
-        </c:rich>
-      </c:tx>
-      <c:layout/>
-    </c:title>
-    <c:plotArea>
-      <c:layout/>
-      <c:lineChart>
-        <c:grouping val="standard"/>
-        <c:ser>
-          <c:idx val="0"/>
-          <c:order val="0"/>
-          <c:tx>
-            <c:v>Context</c:v>
-          </c:tx>
-          <c:spPr>
-            <a:solidFill>
-              <a:srgbClr val="4DA8D3"/>
-            </a:solidFill>
-            <a:ln w="38100">
-              <a:solidFill>
-                <a:srgbClr val="4DA8D3"/>
-              </a:solidFill>
-              <a:prstDash val="solid"/>
-            </a:ln>
-          </c:spPr>
-          <c:marker>
-            <c:symbol val="circle"/>
-            <c:size val="6"/>
-          </c:marker>
-          <c:cat>
-            <c:strLit>
-              <c:ptCount val="6"/>
-              <c:pt idx="0">
-                <c:v>A</c:v>
-              </c:pt>
-              <c:pt idx="1">
-                <c:v>B</c:v>
-              </c:pt>
-              <c:pt idx="2">
-                <c:v>C</c:v>
-              </c:pt>
-              <c:pt idx="3">
-                <c:v>D</c:v>
-              </c:pt>
-              <c:pt idx="4">
-                <c:v>E</c:v>
-              </c:pt>
-              <c:pt idx="5">
-                <c:v>F</c:v>
-              </c:pt>
-            </c:strLit>
-          </c:cat>
-          <c:val>
-            <c:numLit>
-              <c:formatCode>General</c:formatCode>
-              <c:ptCount val="6"/>
-              <c:pt idx="0">
-                <c:v>34</c:v>
-              </c:pt>
-              <c:pt idx="1">
-                <c:v>39</c:v>
-              </c:pt>
-              <c:pt idx="2">
-                <c:v>41</c:v>
-              </c:pt>
-              <c:pt idx="3">
-                <c:v>45</c:v>
-              </c:pt>
-              <c:pt idx="4">
-                <c:v>49</c:v>
-              </c:pt>
-              <c:pt idx="5">
-                <c:v>52</c:v>
-              </c:pt>
-            </c:numLit>
-          </c:val>
-        </c:ser>
-        <c:axId val="1"/>
-        <c:axId val="2"/>
-      </c:lineChart>
-      <c:catAx>
-        <c:axId val="1"/>
-        <c:scaling>
-          <c:orientation val="minMax"/>
-        </c:scaling>
-        <c:axPos val="b"/>
-        <c:crossAx val="2"/>
-      </c:catAx>
-      <c:valAx>
-        <c:axId val="2"/>
-        <c:scaling>
-          <c:orientation val="minMax"/>
-        </c:scaling>
-        <c:axPos val="l"/>
-        <c:crossAx val="1"/>
-      </c:valAx>
-    </c:plotArea>
-    <c:plotVisOnly val="1"/>
-  </c:chart>
-</c:chartSpace>
-</file>
-
 <file path=ppt/slides/slide1.xml><?xml version="1.0" encoding="utf-8"?>
 <p:sld xmlns:p="http://schemas.openxmlformats.org/presentationml/2006/main">
   <p:cSld name="Opening proposition">
     <p:bg>
       <p:bgPr>
         <a:blipFill xmlns:a="http://schemas.openxmlformats.org/drawingml/2006/main">
-          <a:blip xmlns:r="http://schemas.openxmlformats.org/officeDocument/2006/relationships" r:embed="rIdOfficeKitImage45ba195e2a5649fb_1"/>
+          <a:blip xmlns:r="http://schemas.openxmlformats.org/officeDocument/2006/relationships" r:embed="rIdOfficeKitImage4efaa6e338175447_1"/>
           <a:stretch>
             <a:fillRect/>
           </a:stretch>
@@ -2258,6 +2037,1289 @@
       <p:sp>
         <p:nvSpPr>
           <p:cNvPr id="7" name="evidence-rule"/>
+          <p:cNvSpPr/>
+          <p:nvPr/>
+        </p:nvSpPr>
+        <p:spPr>
+          <a:xfrm xmlns:a="http://schemas.openxmlformats.org/drawingml/2006/main">
+            <a:off x="914400" y="2457450"/>
+            <a:ext cx="13411200" cy="0"/>
+          </a:xfrm>
+          <a:prstGeom xmlns:a="http://schemas.openxmlformats.org/drawingml/2006/main" prst="line">
+            <a:avLst/>
+          </a:prstGeom>
+          <a:noFill xmlns:a="http://schemas.openxmlformats.org/drawingml/2006/main"/>
+          <a:ln xmlns:a="http://schemas.openxmlformats.org/drawingml/2006/main" w="25400">
+            <a:solidFill>
+              <a:srgbClr val="8DA0B0"/>
+            </a:solidFill>
+            <a:prstDash val="solid"/>
+          </a:ln>
+        </p:spPr>
+        <p:txBody>
+          <a:bodyPr xmlns:a="http://schemas.openxmlformats.org/drawingml/2006/main" wrap="square" lIns="0" tIns="0" rIns="0" bIns="0" anchor="t"/>
+          <a:lstStyle xmlns:a="http://schemas.openxmlformats.org/drawingml/2006/main"/>
+          <a:p xmlns:a="http://schemas.openxmlformats.org/drawingml/2006/main">
+            <a:r>
+              <a:rPr lang="en-US"/>
+              <a:t/>
+            </a:r>
+            <a:endParaRPr lang="en-US"/>
+          </a:p>
+        </p:txBody>
+      </p:sp>
+      <p:sp>
+        <p:nvSpPr>
+          <p:cNvPr id="8" name="timeline-label"/>
+          <p:cNvSpPr txBox="1"/>
+          <p:nvPr/>
+        </p:nvSpPr>
+        <p:spPr>
+          <a:xfrm xmlns:a="http://schemas.openxmlformats.org/drawingml/2006/main">
+            <a:off x="1066800" y="3238500"/>
+            <a:ext cx="4000500" cy="228600"/>
+          </a:xfrm>
+          <a:prstGeom xmlns:a="http://schemas.openxmlformats.org/drawingml/2006/main" prst="rect">
+            <a:avLst/>
+          </a:prstGeom>
+          <a:noFill xmlns:a="http://schemas.openxmlformats.org/drawingml/2006/main"/>
+          <a:ln xmlns:a="http://schemas.openxmlformats.org/drawingml/2006/main" w="0">
+            <a:noFill/>
+          </a:ln>
+        </p:spPr>
+        <p:txBody>
+          <a:bodyPr xmlns:a="http://schemas.openxmlformats.org/drawingml/2006/main" wrap="square" lIns="0" tIns="0" rIns="0" bIns="0" anchor="t"/>
+          <a:lstStyle xmlns:a="http://schemas.openxmlformats.org/drawingml/2006/main"/>
+          <a:p xmlns:a="http://schemas.openxmlformats.org/drawingml/2006/main">
+            <a:r>
+              <a:rPr lang="en-US" sz="1125" b="1">
+                <a:solidFill>
+                  <a:srgbClr val="70508F"/>
+                </a:solidFill>
+                <a:latin typeface="Arial"/>
+                <a:ea typeface="Arial"/>
+              </a:rPr>
+              <a:t>EVOLUTION / TRANSITION</a:t>
+            </a:r>
+            <a:endParaRPr lang="en-US"/>
+          </a:p>
+        </p:txBody>
+      </p:sp>
+      <p:sp>
+        <p:nvSpPr>
+          <p:cNvPr id="9" name="timeline-axis"/>
+          <p:cNvSpPr/>
+          <p:nvPr/>
+        </p:nvSpPr>
+        <p:spPr>
+          <a:xfrm xmlns:a="http://schemas.openxmlformats.org/drawingml/2006/main">
+            <a:off x="1219200" y="4762500"/>
+            <a:ext cx="10287000" cy="0"/>
+          </a:xfrm>
+          <a:prstGeom xmlns:a="http://schemas.openxmlformats.org/drawingml/2006/main" prst="line">
+            <a:avLst/>
+          </a:prstGeom>
+          <a:noFill xmlns:a="http://schemas.openxmlformats.org/drawingml/2006/main"/>
+          <a:ln xmlns:a="http://schemas.openxmlformats.org/drawingml/2006/main" w="38100">
+            <a:solidFill>
+              <a:srgbClr val="8DA0B0"/>
+            </a:solidFill>
+            <a:prstDash val="solid"/>
+          </a:ln>
+        </p:spPr>
+        <p:txBody>
+          <a:bodyPr xmlns:a="http://schemas.openxmlformats.org/drawingml/2006/main" wrap="square" lIns="0" tIns="0" rIns="0" bIns="0" anchor="t"/>
+          <a:lstStyle xmlns:a="http://schemas.openxmlformats.org/drawingml/2006/main"/>
+          <a:p xmlns:a="http://schemas.openxmlformats.org/drawingml/2006/main">
+            <a:r>
+              <a:rPr lang="en-US"/>
+              <a:t/>
+            </a:r>
+            <a:endParaRPr lang="en-US"/>
+          </a:p>
+        </p:txBody>
+      </p:sp>
+      <p:sp>
+        <p:nvSpPr>
+          <p:cNvPr id="10" name="timeline-node-0"/>
+          <p:cNvSpPr/>
+          <p:nvPr/>
+        </p:nvSpPr>
+        <p:spPr>
+          <a:xfrm xmlns:a="http://schemas.openxmlformats.org/drawingml/2006/main">
+            <a:off x="1066800" y="4610100"/>
+            <a:ext cx="304800" cy="304800"/>
+          </a:xfrm>
+          <a:prstGeom xmlns:a="http://schemas.openxmlformats.org/drawingml/2006/main" prst="ellipse">
+            <a:avLst/>
+          </a:prstGeom>
+          <a:solidFill xmlns:a="http://schemas.openxmlformats.org/drawingml/2006/main">
+            <a:srgbClr val="FAFCFD"/>
+          </a:solidFill>
+          <a:ln xmlns:a="http://schemas.openxmlformats.org/drawingml/2006/main" w="25400">
+            <a:solidFill>
+              <a:srgbClr val="173D5C"/>
+            </a:solidFill>
+            <a:prstDash val="solid"/>
+          </a:ln>
+        </p:spPr>
+        <p:txBody>
+          <a:bodyPr xmlns:a="http://schemas.openxmlformats.org/drawingml/2006/main" wrap="square" lIns="0" tIns="0" rIns="0" bIns="0" anchor="t"/>
+          <a:lstStyle xmlns:a="http://schemas.openxmlformats.org/drawingml/2006/main"/>
+          <a:p xmlns:a="http://schemas.openxmlformats.org/drawingml/2006/main">
+            <a:r>
+              <a:rPr lang="en-US"/>
+              <a:t/>
+            </a:r>
+            <a:endParaRPr lang="en-US"/>
+          </a:p>
+        </p:txBody>
+      </p:sp>
+      <p:sp>
+        <p:nvSpPr>
+          <p:cNvPr id="11" name="timeline-number-0"/>
+          <p:cNvSpPr txBox="1"/>
+          <p:nvPr/>
+        </p:nvSpPr>
+        <p:spPr>
+          <a:xfrm xmlns:a="http://schemas.openxmlformats.org/drawingml/2006/main">
+            <a:off x="952500" y="4076700"/>
+            <a:ext cx="533400" cy="190500"/>
+          </a:xfrm>
+          <a:prstGeom xmlns:a="http://schemas.openxmlformats.org/drawingml/2006/main" prst="rect">
+            <a:avLst/>
+          </a:prstGeom>
+          <a:noFill xmlns:a="http://schemas.openxmlformats.org/drawingml/2006/main"/>
+          <a:ln xmlns:a="http://schemas.openxmlformats.org/drawingml/2006/main" w="0">
+            <a:noFill/>
+          </a:ln>
+        </p:spPr>
+        <p:txBody>
+          <a:bodyPr xmlns:a="http://schemas.openxmlformats.org/drawingml/2006/main" wrap="square" lIns="0" tIns="0" rIns="0" bIns="0" anchor="t"/>
+          <a:lstStyle xmlns:a="http://schemas.openxmlformats.org/drawingml/2006/main"/>
+          <a:p xmlns:a="http://schemas.openxmlformats.org/drawingml/2006/main">
+            <a:pPr algn="ctr"/>
+            <a:r>
+              <a:rPr lang="en-US" sz="975" b="1">
+                <a:solidFill>
+                  <a:srgbClr val="70508F"/>
+                </a:solidFill>
+                <a:latin typeface="Arial"/>
+                <a:ea typeface="Arial"/>
+              </a:rPr>
+              <a:t>01</a:t>
+            </a:r>
+            <a:endParaRPr lang="en-US"/>
+          </a:p>
+        </p:txBody>
+      </p:sp>
+      <p:sp>
+        <p:nvSpPr>
+          <p:cNvPr id="12" name="timeline-label-0"/>
+          <p:cNvSpPr txBox="1"/>
+          <p:nvPr/>
+        </p:nvSpPr>
+        <p:spPr>
+          <a:xfrm xmlns:a="http://schemas.openxmlformats.org/drawingml/2006/main">
+            <a:off x="533400" y="5086350"/>
+            <a:ext cx="1371600" cy="228600"/>
+          </a:xfrm>
+          <a:prstGeom xmlns:a="http://schemas.openxmlformats.org/drawingml/2006/main" prst="rect">
+            <a:avLst/>
+          </a:prstGeom>
+          <a:noFill xmlns:a="http://schemas.openxmlformats.org/drawingml/2006/main"/>
+          <a:ln xmlns:a="http://schemas.openxmlformats.org/drawingml/2006/main" w="0">
+            <a:noFill/>
+          </a:ln>
+        </p:spPr>
+        <p:txBody>
+          <a:bodyPr xmlns:a="http://schemas.openxmlformats.org/drawingml/2006/main" wrap="square" lIns="0" tIns="0" rIns="0" bIns="0" anchor="t"/>
+          <a:lstStyle xmlns:a="http://schemas.openxmlformats.org/drawingml/2006/main"/>
+          <a:p xmlns:a="http://schemas.openxmlformats.org/drawingml/2006/main">
+            <a:pPr algn="ctr"/>
+            <a:r>
+              <a:rPr lang="en-US" sz="1350" b="1">
+                <a:solidFill>
+                  <a:srgbClr val="173D5C"/>
+                </a:solidFill>
+                <a:latin typeface="Arial"/>
+                <a:ea typeface="Arial"/>
+              </a:rPr>
+              <a:t>Frame</a:t>
+            </a:r>
+            <a:endParaRPr lang="en-US"/>
+          </a:p>
+        </p:txBody>
+      </p:sp>
+      <p:sp>
+        <p:nvSpPr>
+          <p:cNvPr id="13" name="timeline-text-0"/>
+          <p:cNvSpPr txBox="1"/>
+          <p:nvPr/>
+        </p:nvSpPr>
+        <p:spPr>
+          <a:xfrm xmlns:a="http://schemas.openxmlformats.org/drawingml/2006/main">
+            <a:off x="323850" y="5391150"/>
+            <a:ext cx="1790700" cy="361950"/>
+          </a:xfrm>
+          <a:prstGeom xmlns:a="http://schemas.openxmlformats.org/drawingml/2006/main" prst="rect">
+            <a:avLst/>
+          </a:prstGeom>
+          <a:noFill xmlns:a="http://schemas.openxmlformats.org/drawingml/2006/main"/>
+          <a:ln xmlns:a="http://schemas.openxmlformats.org/drawingml/2006/main" w="0">
+            <a:noFill/>
+          </a:ln>
+        </p:spPr>
+        <p:txBody>
+          <a:bodyPr xmlns:a="http://schemas.openxmlformats.org/drawingml/2006/main" wrap="square" lIns="0" tIns="0" rIns="0" bIns="0" anchor="t"/>
+          <a:lstStyle xmlns:a="http://schemas.openxmlformats.org/drawingml/2006/main"/>
+          <a:p xmlns:a="http://schemas.openxmlformats.org/drawingml/2006/main">
+            <a:pPr algn="ctr"/>
+            <a:r>
+              <a:rPr lang="en-US" sz="1050">
+                <a:solidFill>
+                  <a:srgbClr val="8DA0B0"/>
+                </a:solidFill>
+                <a:latin typeface="Arial"/>
+                <a:ea typeface="Arial"/>
+              </a:rPr>
+              <a:t>Name the question</a:t>
+            </a:r>
+            <a:endParaRPr lang="en-US"/>
+          </a:p>
+        </p:txBody>
+      </p:sp>
+      <p:sp>
+        <p:nvSpPr>
+          <p:cNvPr id="14" name="timeline-node-1"/>
+          <p:cNvSpPr/>
+          <p:nvPr/>
+        </p:nvSpPr>
+        <p:spPr>
+          <a:xfrm xmlns:a="http://schemas.openxmlformats.org/drawingml/2006/main">
+            <a:off x="3638550" y="4610100"/>
+            <a:ext cx="304800" cy="304800"/>
+          </a:xfrm>
+          <a:prstGeom xmlns:a="http://schemas.openxmlformats.org/drawingml/2006/main" prst="ellipse">
+            <a:avLst/>
+          </a:prstGeom>
+          <a:solidFill xmlns:a="http://schemas.openxmlformats.org/drawingml/2006/main">
+            <a:srgbClr val="FAFCFD"/>
+          </a:solidFill>
+          <a:ln xmlns:a="http://schemas.openxmlformats.org/drawingml/2006/main" w="25400">
+            <a:solidFill>
+              <a:srgbClr val="173D5C"/>
+            </a:solidFill>
+            <a:prstDash val="solid"/>
+          </a:ln>
+        </p:spPr>
+        <p:txBody>
+          <a:bodyPr xmlns:a="http://schemas.openxmlformats.org/drawingml/2006/main" wrap="square" lIns="0" tIns="0" rIns="0" bIns="0" anchor="t"/>
+          <a:lstStyle xmlns:a="http://schemas.openxmlformats.org/drawingml/2006/main"/>
+          <a:p xmlns:a="http://schemas.openxmlformats.org/drawingml/2006/main">
+            <a:r>
+              <a:rPr lang="en-US"/>
+              <a:t/>
+            </a:r>
+            <a:endParaRPr lang="en-US"/>
+          </a:p>
+        </p:txBody>
+      </p:sp>
+      <p:sp>
+        <p:nvSpPr>
+          <p:cNvPr id="15" name="timeline-number-1"/>
+          <p:cNvSpPr txBox="1"/>
+          <p:nvPr/>
+        </p:nvSpPr>
+        <p:spPr>
+          <a:xfrm xmlns:a="http://schemas.openxmlformats.org/drawingml/2006/main">
+            <a:off x="3524250" y="4076700"/>
+            <a:ext cx="533400" cy="190500"/>
+          </a:xfrm>
+          <a:prstGeom xmlns:a="http://schemas.openxmlformats.org/drawingml/2006/main" prst="rect">
+            <a:avLst/>
+          </a:prstGeom>
+          <a:noFill xmlns:a="http://schemas.openxmlformats.org/drawingml/2006/main"/>
+          <a:ln xmlns:a="http://schemas.openxmlformats.org/drawingml/2006/main" w="0">
+            <a:noFill/>
+          </a:ln>
+        </p:spPr>
+        <p:txBody>
+          <a:bodyPr xmlns:a="http://schemas.openxmlformats.org/drawingml/2006/main" wrap="square" lIns="0" tIns="0" rIns="0" bIns="0" anchor="t"/>
+          <a:lstStyle xmlns:a="http://schemas.openxmlformats.org/drawingml/2006/main"/>
+          <a:p xmlns:a="http://schemas.openxmlformats.org/drawingml/2006/main">
+            <a:pPr algn="ctr"/>
+            <a:r>
+              <a:rPr lang="en-US" sz="975" b="1">
+                <a:solidFill>
+                  <a:srgbClr val="70508F"/>
+                </a:solidFill>
+                <a:latin typeface="Arial"/>
+                <a:ea typeface="Arial"/>
+              </a:rPr>
+              <a:t>02</a:t>
+            </a:r>
+            <a:endParaRPr lang="en-US"/>
+          </a:p>
+        </p:txBody>
+      </p:sp>
+      <p:sp>
+        <p:nvSpPr>
+          <p:cNvPr id="16" name="timeline-label-1"/>
+          <p:cNvSpPr txBox="1"/>
+          <p:nvPr/>
+        </p:nvSpPr>
+        <p:spPr>
+          <a:xfrm xmlns:a="http://schemas.openxmlformats.org/drawingml/2006/main">
+            <a:off x="3105150" y="5086350"/>
+            <a:ext cx="1371600" cy="228600"/>
+          </a:xfrm>
+          <a:prstGeom xmlns:a="http://schemas.openxmlformats.org/drawingml/2006/main" prst="rect">
+            <a:avLst/>
+          </a:prstGeom>
+          <a:noFill xmlns:a="http://schemas.openxmlformats.org/drawingml/2006/main"/>
+          <a:ln xmlns:a="http://schemas.openxmlformats.org/drawingml/2006/main" w="0">
+            <a:noFill/>
+          </a:ln>
+        </p:spPr>
+        <p:txBody>
+          <a:bodyPr xmlns:a="http://schemas.openxmlformats.org/drawingml/2006/main" wrap="square" lIns="0" tIns="0" rIns="0" bIns="0" anchor="t"/>
+          <a:lstStyle xmlns:a="http://schemas.openxmlformats.org/drawingml/2006/main"/>
+          <a:p xmlns:a="http://schemas.openxmlformats.org/drawingml/2006/main">
+            <a:pPr algn="ctr"/>
+            <a:r>
+              <a:rPr lang="en-US" sz="1350" b="1">
+                <a:solidFill>
+                  <a:srgbClr val="173D5C"/>
+                </a:solidFill>
+                <a:latin typeface="Arial"/>
+                <a:ea typeface="Arial"/>
+              </a:rPr>
+              <a:t>Test</a:t>
+            </a:r>
+            <a:endParaRPr lang="en-US"/>
+          </a:p>
+        </p:txBody>
+      </p:sp>
+      <p:sp>
+        <p:nvSpPr>
+          <p:cNvPr id="17" name="timeline-text-1"/>
+          <p:cNvSpPr txBox="1"/>
+          <p:nvPr/>
+        </p:nvSpPr>
+        <p:spPr>
+          <a:xfrm xmlns:a="http://schemas.openxmlformats.org/drawingml/2006/main">
+            <a:off x="2895600" y="5391150"/>
+            <a:ext cx="1790700" cy="361950"/>
+          </a:xfrm>
+          <a:prstGeom xmlns:a="http://schemas.openxmlformats.org/drawingml/2006/main" prst="rect">
+            <a:avLst/>
+          </a:prstGeom>
+          <a:noFill xmlns:a="http://schemas.openxmlformats.org/drawingml/2006/main"/>
+          <a:ln xmlns:a="http://schemas.openxmlformats.org/drawingml/2006/main" w="0">
+            <a:noFill/>
+          </a:ln>
+        </p:spPr>
+        <p:txBody>
+          <a:bodyPr xmlns:a="http://schemas.openxmlformats.org/drawingml/2006/main" wrap="square" lIns="0" tIns="0" rIns="0" bIns="0" anchor="t"/>
+          <a:lstStyle xmlns:a="http://schemas.openxmlformats.org/drawingml/2006/main"/>
+          <a:p xmlns:a="http://schemas.openxmlformats.org/drawingml/2006/main">
+            <a:pPr algn="ctr"/>
+            <a:r>
+              <a:rPr lang="en-US" sz="1050">
+                <a:solidFill>
+                  <a:srgbClr val="8DA0B0"/>
+                </a:solidFill>
+                <a:latin typeface="Arial"/>
+                <a:ea typeface="Arial"/>
+              </a:rPr>
+              <a:t>Hold the rule</a:t>
+            </a:r>
+            <a:endParaRPr lang="en-US"/>
+          </a:p>
+        </p:txBody>
+      </p:sp>
+      <p:sp>
+        <p:nvSpPr>
+          <p:cNvPr id="18" name="timeline-node-2"/>
+          <p:cNvSpPr/>
+          <p:nvPr/>
+        </p:nvSpPr>
+        <p:spPr>
+          <a:xfrm xmlns:a="http://schemas.openxmlformats.org/drawingml/2006/main">
+            <a:off x="6210300" y="4610100"/>
+            <a:ext cx="304800" cy="304800"/>
+          </a:xfrm>
+          <a:prstGeom xmlns:a="http://schemas.openxmlformats.org/drawingml/2006/main" prst="ellipse">
+            <a:avLst/>
+          </a:prstGeom>
+          <a:solidFill xmlns:a="http://schemas.openxmlformats.org/drawingml/2006/main">
+            <a:srgbClr val="FAFCFD"/>
+          </a:solidFill>
+          <a:ln xmlns:a="http://schemas.openxmlformats.org/drawingml/2006/main" w="25400">
+            <a:solidFill>
+              <a:srgbClr val="173D5C"/>
+            </a:solidFill>
+            <a:prstDash val="solid"/>
+          </a:ln>
+        </p:spPr>
+        <p:txBody>
+          <a:bodyPr xmlns:a="http://schemas.openxmlformats.org/drawingml/2006/main" wrap="square" lIns="0" tIns="0" rIns="0" bIns="0" anchor="t"/>
+          <a:lstStyle xmlns:a="http://schemas.openxmlformats.org/drawingml/2006/main"/>
+          <a:p xmlns:a="http://schemas.openxmlformats.org/drawingml/2006/main">
+            <a:r>
+              <a:rPr lang="en-US"/>
+              <a:t/>
+            </a:r>
+            <a:endParaRPr lang="en-US"/>
+          </a:p>
+        </p:txBody>
+      </p:sp>
+      <p:sp>
+        <p:nvSpPr>
+          <p:cNvPr id="19" name="timeline-number-2"/>
+          <p:cNvSpPr txBox="1"/>
+          <p:nvPr/>
+        </p:nvSpPr>
+        <p:spPr>
+          <a:xfrm xmlns:a="http://schemas.openxmlformats.org/drawingml/2006/main">
+            <a:off x="6096000" y="4076700"/>
+            <a:ext cx="533400" cy="190500"/>
+          </a:xfrm>
+          <a:prstGeom xmlns:a="http://schemas.openxmlformats.org/drawingml/2006/main" prst="rect">
+            <a:avLst/>
+          </a:prstGeom>
+          <a:noFill xmlns:a="http://schemas.openxmlformats.org/drawingml/2006/main"/>
+          <a:ln xmlns:a="http://schemas.openxmlformats.org/drawingml/2006/main" w="0">
+            <a:noFill/>
+          </a:ln>
+        </p:spPr>
+        <p:txBody>
+          <a:bodyPr xmlns:a="http://schemas.openxmlformats.org/drawingml/2006/main" wrap="square" lIns="0" tIns="0" rIns="0" bIns="0" anchor="t"/>
+          <a:lstStyle xmlns:a="http://schemas.openxmlformats.org/drawingml/2006/main"/>
+          <a:p xmlns:a="http://schemas.openxmlformats.org/drawingml/2006/main">
+            <a:pPr algn="ctr"/>
+            <a:r>
+              <a:rPr lang="en-US" sz="975" b="1">
+                <a:solidFill>
+                  <a:srgbClr val="70508F"/>
+                </a:solidFill>
+                <a:latin typeface="Arial"/>
+                <a:ea typeface="Arial"/>
+              </a:rPr>
+              <a:t>03</a:t>
+            </a:r>
+            <a:endParaRPr lang="en-US"/>
+          </a:p>
+        </p:txBody>
+      </p:sp>
+      <p:sp>
+        <p:nvSpPr>
+          <p:cNvPr id="20" name="timeline-label-2"/>
+          <p:cNvSpPr txBox="1"/>
+          <p:nvPr/>
+        </p:nvSpPr>
+        <p:spPr>
+          <a:xfrm xmlns:a="http://schemas.openxmlformats.org/drawingml/2006/main">
+            <a:off x="5676900" y="5086350"/>
+            <a:ext cx="1371600" cy="228600"/>
+          </a:xfrm>
+          <a:prstGeom xmlns:a="http://schemas.openxmlformats.org/drawingml/2006/main" prst="rect">
+            <a:avLst/>
+          </a:prstGeom>
+          <a:noFill xmlns:a="http://schemas.openxmlformats.org/drawingml/2006/main"/>
+          <a:ln xmlns:a="http://schemas.openxmlformats.org/drawingml/2006/main" w="0">
+            <a:noFill/>
+          </a:ln>
+        </p:spPr>
+        <p:txBody>
+          <a:bodyPr xmlns:a="http://schemas.openxmlformats.org/drawingml/2006/main" wrap="square" lIns="0" tIns="0" rIns="0" bIns="0" anchor="t"/>
+          <a:lstStyle xmlns:a="http://schemas.openxmlformats.org/drawingml/2006/main"/>
+          <a:p xmlns:a="http://schemas.openxmlformats.org/drawingml/2006/main">
+            <a:pPr algn="ctr"/>
+            <a:r>
+              <a:rPr lang="en-US" sz="1350" b="1">
+                <a:solidFill>
+                  <a:srgbClr val="173D5C"/>
+                </a:solidFill>
+                <a:latin typeface="Arial"/>
+                <a:ea typeface="Arial"/>
+              </a:rPr>
+              <a:t>Read</a:t>
+            </a:r>
+            <a:endParaRPr lang="en-US"/>
+          </a:p>
+        </p:txBody>
+      </p:sp>
+      <p:sp>
+        <p:nvSpPr>
+          <p:cNvPr id="21" name="timeline-text-2"/>
+          <p:cNvSpPr txBox="1"/>
+          <p:nvPr/>
+        </p:nvSpPr>
+        <p:spPr>
+          <a:xfrm xmlns:a="http://schemas.openxmlformats.org/drawingml/2006/main">
+            <a:off x="5467350" y="5391150"/>
+            <a:ext cx="1790700" cy="361950"/>
+          </a:xfrm>
+          <a:prstGeom xmlns:a="http://schemas.openxmlformats.org/drawingml/2006/main" prst="rect">
+            <a:avLst/>
+          </a:prstGeom>
+          <a:noFill xmlns:a="http://schemas.openxmlformats.org/drawingml/2006/main"/>
+          <a:ln xmlns:a="http://schemas.openxmlformats.org/drawingml/2006/main" w="0">
+            <a:noFill/>
+          </a:ln>
+        </p:spPr>
+        <p:txBody>
+          <a:bodyPr xmlns:a="http://schemas.openxmlformats.org/drawingml/2006/main" wrap="square" lIns="0" tIns="0" rIns="0" bIns="0" anchor="t"/>
+          <a:lstStyle xmlns:a="http://schemas.openxmlformats.org/drawingml/2006/main"/>
+          <a:p xmlns:a="http://schemas.openxmlformats.org/drawingml/2006/main">
+            <a:pPr algn="ctr"/>
+            <a:r>
+              <a:rPr lang="en-US" sz="1050">
+                <a:solidFill>
+                  <a:srgbClr val="8DA0B0"/>
+                </a:solidFill>
+                <a:latin typeface="Arial"/>
+                <a:ea typeface="Arial"/>
+              </a:rPr>
+              <a:t>Separate signal</a:t>
+            </a:r>
+            <a:endParaRPr lang="en-US"/>
+          </a:p>
+        </p:txBody>
+      </p:sp>
+      <p:sp>
+        <p:nvSpPr>
+          <p:cNvPr id="22" name="timeline-node-3"/>
+          <p:cNvSpPr/>
+          <p:nvPr/>
+        </p:nvSpPr>
+        <p:spPr>
+          <a:xfrm xmlns:a="http://schemas.openxmlformats.org/drawingml/2006/main">
+            <a:off x="8782050" y="4610100"/>
+            <a:ext cx="304800" cy="304800"/>
+          </a:xfrm>
+          <a:prstGeom xmlns:a="http://schemas.openxmlformats.org/drawingml/2006/main" prst="ellipse">
+            <a:avLst/>
+          </a:prstGeom>
+          <a:solidFill xmlns:a="http://schemas.openxmlformats.org/drawingml/2006/main">
+            <a:srgbClr val="FAFCFD"/>
+          </a:solidFill>
+          <a:ln xmlns:a="http://schemas.openxmlformats.org/drawingml/2006/main" w="25400">
+            <a:solidFill>
+              <a:srgbClr val="173D5C"/>
+            </a:solidFill>
+            <a:prstDash val="solid"/>
+          </a:ln>
+        </p:spPr>
+        <p:txBody>
+          <a:bodyPr xmlns:a="http://schemas.openxmlformats.org/drawingml/2006/main" wrap="square" lIns="0" tIns="0" rIns="0" bIns="0" anchor="t"/>
+          <a:lstStyle xmlns:a="http://schemas.openxmlformats.org/drawingml/2006/main"/>
+          <a:p xmlns:a="http://schemas.openxmlformats.org/drawingml/2006/main">
+            <a:r>
+              <a:rPr lang="en-US"/>
+              <a:t/>
+            </a:r>
+            <a:endParaRPr lang="en-US"/>
+          </a:p>
+        </p:txBody>
+      </p:sp>
+      <p:sp>
+        <p:nvSpPr>
+          <p:cNvPr id="23" name="timeline-number-3"/>
+          <p:cNvSpPr txBox="1"/>
+          <p:nvPr/>
+        </p:nvSpPr>
+        <p:spPr>
+          <a:xfrm xmlns:a="http://schemas.openxmlformats.org/drawingml/2006/main">
+            <a:off x="8667750" y="4076700"/>
+            <a:ext cx="533400" cy="190500"/>
+          </a:xfrm>
+          <a:prstGeom xmlns:a="http://schemas.openxmlformats.org/drawingml/2006/main" prst="rect">
+            <a:avLst/>
+          </a:prstGeom>
+          <a:noFill xmlns:a="http://schemas.openxmlformats.org/drawingml/2006/main"/>
+          <a:ln xmlns:a="http://schemas.openxmlformats.org/drawingml/2006/main" w="0">
+            <a:noFill/>
+          </a:ln>
+        </p:spPr>
+        <p:txBody>
+          <a:bodyPr xmlns:a="http://schemas.openxmlformats.org/drawingml/2006/main" wrap="square" lIns="0" tIns="0" rIns="0" bIns="0" anchor="t"/>
+          <a:lstStyle xmlns:a="http://schemas.openxmlformats.org/drawingml/2006/main"/>
+          <a:p xmlns:a="http://schemas.openxmlformats.org/drawingml/2006/main">
+            <a:pPr algn="ctr"/>
+            <a:r>
+              <a:rPr lang="en-US" sz="975" b="1">
+                <a:solidFill>
+                  <a:srgbClr val="70508F"/>
+                </a:solidFill>
+                <a:latin typeface="Arial"/>
+                <a:ea typeface="Arial"/>
+              </a:rPr>
+              <a:t>04</a:t>
+            </a:r>
+            <a:endParaRPr lang="en-US"/>
+          </a:p>
+        </p:txBody>
+      </p:sp>
+      <p:sp>
+        <p:nvSpPr>
+          <p:cNvPr id="24" name="timeline-label-3"/>
+          <p:cNvSpPr txBox="1"/>
+          <p:nvPr/>
+        </p:nvSpPr>
+        <p:spPr>
+          <a:xfrm xmlns:a="http://schemas.openxmlformats.org/drawingml/2006/main">
+            <a:off x="8248650" y="5086350"/>
+            <a:ext cx="1371600" cy="228600"/>
+          </a:xfrm>
+          <a:prstGeom xmlns:a="http://schemas.openxmlformats.org/drawingml/2006/main" prst="rect">
+            <a:avLst/>
+          </a:prstGeom>
+          <a:noFill xmlns:a="http://schemas.openxmlformats.org/drawingml/2006/main"/>
+          <a:ln xmlns:a="http://schemas.openxmlformats.org/drawingml/2006/main" w="0">
+            <a:noFill/>
+          </a:ln>
+        </p:spPr>
+        <p:txBody>
+          <a:bodyPr xmlns:a="http://schemas.openxmlformats.org/drawingml/2006/main" wrap="square" lIns="0" tIns="0" rIns="0" bIns="0" anchor="t"/>
+          <a:lstStyle xmlns:a="http://schemas.openxmlformats.org/drawingml/2006/main"/>
+          <a:p xmlns:a="http://schemas.openxmlformats.org/drawingml/2006/main">
+            <a:pPr algn="ctr"/>
+            <a:r>
+              <a:rPr lang="en-US" sz="1350" b="1">
+                <a:solidFill>
+                  <a:srgbClr val="173D5C"/>
+                </a:solidFill>
+                <a:latin typeface="Arial"/>
+                <a:ea typeface="Arial"/>
+              </a:rPr>
+              <a:t>Move</a:t>
+            </a:r>
+            <a:endParaRPr lang="en-US"/>
+          </a:p>
+        </p:txBody>
+      </p:sp>
+      <p:sp>
+        <p:nvSpPr>
+          <p:cNvPr id="25" name="timeline-text-3"/>
+          <p:cNvSpPr txBox="1"/>
+          <p:nvPr/>
+        </p:nvSpPr>
+        <p:spPr>
+          <a:xfrm xmlns:a="http://schemas.openxmlformats.org/drawingml/2006/main">
+            <a:off x="8039100" y="5391150"/>
+            <a:ext cx="1790700" cy="361950"/>
+          </a:xfrm>
+          <a:prstGeom xmlns:a="http://schemas.openxmlformats.org/drawingml/2006/main" prst="rect">
+            <a:avLst/>
+          </a:prstGeom>
+          <a:noFill xmlns:a="http://schemas.openxmlformats.org/drawingml/2006/main"/>
+          <a:ln xmlns:a="http://schemas.openxmlformats.org/drawingml/2006/main" w="0">
+            <a:noFill/>
+          </a:ln>
+        </p:spPr>
+        <p:txBody>
+          <a:bodyPr xmlns:a="http://schemas.openxmlformats.org/drawingml/2006/main" wrap="square" lIns="0" tIns="0" rIns="0" bIns="0" anchor="t"/>
+          <a:lstStyle xmlns:a="http://schemas.openxmlformats.org/drawingml/2006/main"/>
+          <a:p xmlns:a="http://schemas.openxmlformats.org/drawingml/2006/main">
+            <a:pPr algn="ctr"/>
+            <a:r>
+              <a:rPr lang="en-US" sz="1050">
+                <a:solidFill>
+                  <a:srgbClr val="8DA0B0"/>
+                </a:solidFill>
+                <a:latin typeface="Arial"/>
+                <a:ea typeface="Arial"/>
+              </a:rPr>
+              <a:t>Set the next gate</a:t>
+            </a:r>
+            <a:endParaRPr lang="en-US"/>
+          </a:p>
+        </p:txBody>
+      </p:sp>
+      <p:sp>
+        <p:nvSpPr>
+          <p:cNvPr id="26" name="timeline-node-4"/>
+          <p:cNvSpPr/>
+          <p:nvPr/>
+        </p:nvSpPr>
+        <p:spPr>
+          <a:xfrm xmlns:a="http://schemas.openxmlformats.org/drawingml/2006/main">
+            <a:off x="11353800" y="4610100"/>
+            <a:ext cx="304800" cy="304800"/>
+          </a:xfrm>
+          <a:prstGeom xmlns:a="http://schemas.openxmlformats.org/drawingml/2006/main" prst="ellipse">
+            <a:avLst/>
+          </a:prstGeom>
+          <a:solidFill xmlns:a="http://schemas.openxmlformats.org/drawingml/2006/main">
+            <a:srgbClr val="70508F"/>
+          </a:solidFill>
+          <a:ln xmlns:a="http://schemas.openxmlformats.org/drawingml/2006/main" w="25400">
+            <a:solidFill>
+              <a:srgbClr val="70508F"/>
+            </a:solidFill>
+            <a:prstDash val="solid"/>
+          </a:ln>
+        </p:spPr>
+        <p:txBody>
+          <a:bodyPr xmlns:a="http://schemas.openxmlformats.org/drawingml/2006/main" wrap="square" lIns="0" tIns="0" rIns="0" bIns="0" anchor="t"/>
+          <a:lstStyle xmlns:a="http://schemas.openxmlformats.org/drawingml/2006/main"/>
+          <a:p xmlns:a="http://schemas.openxmlformats.org/drawingml/2006/main">
+            <a:r>
+              <a:rPr lang="en-US"/>
+              <a:t/>
+            </a:r>
+            <a:endParaRPr lang="en-US"/>
+          </a:p>
+        </p:txBody>
+      </p:sp>
+      <p:sp>
+        <p:nvSpPr>
+          <p:cNvPr id="27" name="timeline-number-4"/>
+          <p:cNvSpPr txBox="1"/>
+          <p:nvPr/>
+        </p:nvSpPr>
+        <p:spPr>
+          <a:xfrm xmlns:a="http://schemas.openxmlformats.org/drawingml/2006/main">
+            <a:off x="11239500" y="4076700"/>
+            <a:ext cx="533400" cy="190500"/>
+          </a:xfrm>
+          <a:prstGeom xmlns:a="http://schemas.openxmlformats.org/drawingml/2006/main" prst="rect">
+            <a:avLst/>
+          </a:prstGeom>
+          <a:noFill xmlns:a="http://schemas.openxmlformats.org/drawingml/2006/main"/>
+          <a:ln xmlns:a="http://schemas.openxmlformats.org/drawingml/2006/main" w="0">
+            <a:noFill/>
+          </a:ln>
+        </p:spPr>
+        <p:txBody>
+          <a:bodyPr xmlns:a="http://schemas.openxmlformats.org/drawingml/2006/main" wrap="square" lIns="0" tIns="0" rIns="0" bIns="0" anchor="t"/>
+          <a:lstStyle xmlns:a="http://schemas.openxmlformats.org/drawingml/2006/main"/>
+          <a:p xmlns:a="http://schemas.openxmlformats.org/drawingml/2006/main">
+            <a:pPr algn="ctr"/>
+            <a:r>
+              <a:rPr lang="en-US" sz="975" b="1">
+                <a:solidFill>
+                  <a:srgbClr val="70508F"/>
+                </a:solidFill>
+                <a:latin typeface="Arial"/>
+                <a:ea typeface="Arial"/>
+              </a:rPr>
+              <a:t>05</a:t>
+            </a:r>
+            <a:endParaRPr lang="en-US"/>
+          </a:p>
+        </p:txBody>
+      </p:sp>
+      <p:sp>
+        <p:nvSpPr>
+          <p:cNvPr id="28" name="timeline-label-4"/>
+          <p:cNvSpPr txBox="1"/>
+          <p:nvPr/>
+        </p:nvSpPr>
+        <p:spPr>
+          <a:xfrm xmlns:a="http://schemas.openxmlformats.org/drawingml/2006/main">
+            <a:off x="10820400" y="5086350"/>
+            <a:ext cx="1371600" cy="228600"/>
+          </a:xfrm>
+          <a:prstGeom xmlns:a="http://schemas.openxmlformats.org/drawingml/2006/main" prst="rect">
+            <a:avLst/>
+          </a:prstGeom>
+          <a:noFill xmlns:a="http://schemas.openxmlformats.org/drawingml/2006/main"/>
+          <a:ln xmlns:a="http://schemas.openxmlformats.org/drawingml/2006/main" w="0">
+            <a:noFill/>
+          </a:ln>
+        </p:spPr>
+        <p:txBody>
+          <a:bodyPr xmlns:a="http://schemas.openxmlformats.org/drawingml/2006/main" wrap="square" lIns="0" tIns="0" rIns="0" bIns="0" anchor="t"/>
+          <a:lstStyle xmlns:a="http://schemas.openxmlformats.org/drawingml/2006/main"/>
+          <a:p xmlns:a="http://schemas.openxmlformats.org/drawingml/2006/main">
+            <a:pPr algn="ctr"/>
+            <a:r>
+              <a:rPr lang="en-US" sz="1350" b="1">
+                <a:solidFill>
+                  <a:srgbClr val="173D5C"/>
+                </a:solidFill>
+                <a:latin typeface="Arial"/>
+                <a:ea typeface="Arial"/>
+              </a:rPr>
+              <a:t>Scale</a:t>
+            </a:r>
+            <a:endParaRPr lang="en-US"/>
+          </a:p>
+        </p:txBody>
+      </p:sp>
+      <p:sp>
+        <p:nvSpPr>
+          <p:cNvPr id="29" name="timeline-text-4"/>
+          <p:cNvSpPr txBox="1"/>
+          <p:nvPr/>
+        </p:nvSpPr>
+        <p:spPr>
+          <a:xfrm xmlns:a="http://schemas.openxmlformats.org/drawingml/2006/main">
+            <a:off x="10610850" y="5391150"/>
+            <a:ext cx="1790700" cy="361950"/>
+          </a:xfrm>
+          <a:prstGeom xmlns:a="http://schemas.openxmlformats.org/drawingml/2006/main" prst="rect">
+            <a:avLst/>
+          </a:prstGeom>
+          <a:noFill xmlns:a="http://schemas.openxmlformats.org/drawingml/2006/main"/>
+          <a:ln xmlns:a="http://schemas.openxmlformats.org/drawingml/2006/main" w="0">
+            <a:noFill/>
+          </a:ln>
+        </p:spPr>
+        <p:txBody>
+          <a:bodyPr xmlns:a="http://schemas.openxmlformats.org/drawingml/2006/main" wrap="square" lIns="0" tIns="0" rIns="0" bIns="0" anchor="t"/>
+          <a:lstStyle xmlns:a="http://schemas.openxmlformats.org/drawingml/2006/main"/>
+          <a:p xmlns:a="http://schemas.openxmlformats.org/drawingml/2006/main">
+            <a:pPr algn="ctr"/>
+            <a:r>
+              <a:rPr lang="en-US" sz="1050">
+                <a:solidFill>
+                  <a:srgbClr val="8DA0B0"/>
+                </a:solidFill>
+                <a:latin typeface="Arial"/>
+                <a:ea typeface="Arial"/>
+              </a:rPr>
+              <a:t>Repeat what held</a:t>
+            </a:r>
+            <a:endParaRPr lang="en-US"/>
+          </a:p>
+        </p:txBody>
+      </p:sp>
+      <p:sp>
+        <p:nvSpPr>
+          <p:cNvPr id="30" name="timeline-read-label"/>
+          <p:cNvSpPr txBox="1"/>
+          <p:nvPr/>
+        </p:nvSpPr>
+        <p:spPr>
+          <a:xfrm xmlns:a="http://schemas.openxmlformats.org/drawingml/2006/main">
+            <a:off x="1066800" y="6667500"/>
+            <a:ext cx="2286000" cy="209550"/>
+          </a:xfrm>
+          <a:prstGeom xmlns:a="http://schemas.openxmlformats.org/drawingml/2006/main" prst="rect">
+            <a:avLst/>
+          </a:prstGeom>
+          <a:noFill xmlns:a="http://schemas.openxmlformats.org/drawingml/2006/main"/>
+          <a:ln xmlns:a="http://schemas.openxmlformats.org/drawingml/2006/main" w="0">
+            <a:noFill/>
+          </a:ln>
+        </p:spPr>
+        <p:txBody>
+          <a:bodyPr xmlns:a="http://schemas.openxmlformats.org/drawingml/2006/main" wrap="square" lIns="0" tIns="0" rIns="0" bIns="0" anchor="t"/>
+          <a:lstStyle xmlns:a="http://schemas.openxmlformats.org/drawingml/2006/main"/>
+          <a:p xmlns:a="http://schemas.openxmlformats.org/drawingml/2006/main">
+            <a:r>
+              <a:rPr lang="en-US" sz="1050" b="1">
+                <a:solidFill>
+                  <a:srgbClr val="70508F"/>
+                </a:solidFill>
+                <a:latin typeface="Arial"/>
+                <a:ea typeface="Arial"/>
+              </a:rPr>
+              <a:t>READ-THROUGH</a:t>
+            </a:r>
+            <a:endParaRPr lang="en-US"/>
+          </a:p>
+        </p:txBody>
+      </p:sp>
+      <p:sp>
+        <p:nvSpPr>
+          <p:cNvPr id="31" name="timeline-read"/>
+          <p:cNvSpPr txBox="1"/>
+          <p:nvPr/>
+        </p:nvSpPr>
+        <p:spPr>
+          <a:xfrm xmlns:a="http://schemas.openxmlformats.org/drawingml/2006/main">
+            <a:off x="3333750" y="6629400"/>
+            <a:ext cx="8191500" cy="266700"/>
+          </a:xfrm>
+          <a:prstGeom xmlns:a="http://schemas.openxmlformats.org/drawingml/2006/main" prst="rect">
+            <a:avLst/>
+          </a:prstGeom>
+          <a:noFill xmlns:a="http://schemas.openxmlformats.org/drawingml/2006/main"/>
+          <a:ln xmlns:a="http://schemas.openxmlformats.org/drawingml/2006/main" w="0">
+            <a:noFill/>
+          </a:ln>
+        </p:spPr>
+        <p:txBody>
+          <a:bodyPr xmlns:a="http://schemas.openxmlformats.org/drawingml/2006/main" wrap="square" lIns="0" tIns="0" rIns="0" bIns="0" anchor="t"/>
+          <a:lstStyle xmlns:a="http://schemas.openxmlformats.org/drawingml/2006/main"/>
+          <a:p xmlns:a="http://schemas.openxmlformats.org/drawingml/2006/main">
+            <a:r>
+              <a:rPr lang="en-US" sz="1425" b="1">
+                <a:solidFill>
+                  <a:srgbClr val="173D5C"/>
+                </a:solidFill>
+                <a:latin typeface="Arial"/>
+                <a:ea typeface="Arial"/>
+              </a:rPr>
+              <a:t>A sequence is useful when each handoff changes what can happen next.</a:t>
+            </a:r>
+            <a:endParaRPr lang="en-US"/>
+          </a:p>
+        </p:txBody>
+      </p:sp>
+      <p:sp>
+        <p:nvSpPr>
+          <p:cNvPr id="32" name="evidence-band"/>
+          <p:cNvSpPr/>
+          <p:nvPr/>
+        </p:nvSpPr>
+        <p:spPr>
+          <a:xfrm xmlns:a="http://schemas.openxmlformats.org/drawingml/2006/main">
+            <a:off x="914400" y="6877050"/>
+            <a:ext cx="13411200" cy="552450"/>
+          </a:xfrm>
+          <a:prstGeom xmlns:a="http://schemas.openxmlformats.org/drawingml/2006/main" prst="rect">
+            <a:avLst/>
+          </a:prstGeom>
+          <a:solidFill xmlns:a="http://schemas.openxmlformats.org/drawingml/2006/main">
+            <a:srgbClr val="F3F5F8"/>
+          </a:solidFill>
+          <a:ln xmlns:a="http://schemas.openxmlformats.org/drawingml/2006/main" w="0">
+            <a:solidFill>
+              <a:srgbClr val="F3F5F8"/>
+            </a:solidFill>
+            <a:prstDash val="solid"/>
+          </a:ln>
+        </p:spPr>
+        <p:txBody>
+          <a:bodyPr xmlns:a="http://schemas.openxmlformats.org/drawingml/2006/main" wrap="square" lIns="0" tIns="0" rIns="0" bIns="0" anchor="t"/>
+          <a:lstStyle xmlns:a="http://schemas.openxmlformats.org/drawingml/2006/main"/>
+          <a:p xmlns:a="http://schemas.openxmlformats.org/drawingml/2006/main">
+            <a:r>
+              <a:rPr lang="en-US"/>
+              <a:t/>
+            </a:r>
+            <a:endParaRPr lang="en-US"/>
+          </a:p>
+        </p:txBody>
+      </p:sp>
+      <p:sp>
+        <p:nvSpPr>
+          <p:cNvPr id="33" name="evidence-band-text"/>
+          <p:cNvSpPr txBox="1"/>
+          <p:nvPr/>
+        </p:nvSpPr>
+        <p:spPr>
+          <a:xfrm xmlns:a="http://schemas.openxmlformats.org/drawingml/2006/main">
+            <a:off x="1143000" y="7058025"/>
+            <a:ext cx="12382500" cy="228600"/>
+          </a:xfrm>
+          <a:prstGeom xmlns:a="http://schemas.openxmlformats.org/drawingml/2006/main" prst="rect">
+            <a:avLst/>
+          </a:prstGeom>
+          <a:noFill xmlns:a="http://schemas.openxmlformats.org/drawingml/2006/main"/>
+          <a:ln xmlns:a="http://schemas.openxmlformats.org/drawingml/2006/main" w="0">
+            <a:noFill/>
+          </a:ln>
+        </p:spPr>
+        <p:txBody>
+          <a:bodyPr xmlns:a="http://schemas.openxmlformats.org/drawingml/2006/main" wrap="square" lIns="0" tIns="0" rIns="0" bIns="0" anchor="t"/>
+          <a:lstStyle xmlns:a="http://schemas.openxmlformats.org/drawingml/2006/main"/>
+          <a:p xmlns:a="http://schemas.openxmlformats.org/drawingml/2006/main">
+            <a:r>
+              <a:rPr lang="en-US" sz="1275" b="1">
+                <a:solidFill>
+                  <a:srgbClr val="173D5C"/>
+                </a:solidFill>
+                <a:latin typeface="Arial"/>
+                <a:ea typeface="Arial"/>
+              </a:rPr>
+              <a:t>EVIDENCE  ·  Keep the unit, time window, and limitation adjacent to the number.</a:t>
+            </a:r>
+            <a:endParaRPr lang="en-US"/>
+          </a:p>
+        </p:txBody>
+      </p:sp>
+      <p:sp>
+        <p:nvSpPr>
+          <p:cNvPr id="34" name="source"/>
+          <p:cNvSpPr txBox="1"/>
+          <p:nvPr/>
+        </p:nvSpPr>
+        <p:spPr>
+          <a:xfrm xmlns:a="http://schemas.openxmlformats.org/drawingml/2006/main">
+            <a:off x="914400" y="7829550"/>
+            <a:ext cx="10953750" cy="209550"/>
+          </a:xfrm>
+          <a:prstGeom xmlns:a="http://schemas.openxmlformats.org/drawingml/2006/main" prst="rect">
+            <a:avLst/>
+          </a:prstGeom>
+          <a:noFill xmlns:a="http://schemas.openxmlformats.org/drawingml/2006/main"/>
+          <a:ln xmlns:a="http://schemas.openxmlformats.org/drawingml/2006/main" w="0">
+            <a:noFill/>
+          </a:ln>
+        </p:spPr>
+        <p:txBody>
+          <a:bodyPr xmlns:a="http://schemas.openxmlformats.org/drawingml/2006/main" wrap="square" lIns="0" tIns="0" rIns="0" bIns="0" anchor="t"/>
+          <a:lstStyle xmlns:a="http://schemas.openxmlformats.org/drawingml/2006/main"/>
+          <a:p xmlns:a="http://schemas.openxmlformats.org/drawingml/2006/main">
+            <a:r>
+              <a:rPr lang="en-US" sz="1050">
+                <a:solidFill>
+                  <a:srgbClr val="8DA0B0"/>
+                </a:solidFill>
+                <a:latin typeface="Arial"/>
+                <a:ea typeface="Arial"/>
+              </a:rPr>
+              <a:t>Source: illustrative calibration brief · values are fictional</a:t>
+            </a:r>
+            <a:endParaRPr lang="en-US"/>
+          </a:p>
+        </p:txBody>
+      </p:sp>
+      <p:sp>
+        <p:nvSpPr>
+          <p:cNvPr id="35" name="page-number"/>
+          <p:cNvSpPr txBox="1"/>
+          <p:nvPr/>
+        </p:nvSpPr>
+        <p:spPr>
+          <a:xfrm xmlns:a="http://schemas.openxmlformats.org/drawingml/2006/main">
+            <a:off x="13335000" y="7829550"/>
+            <a:ext cx="952500" cy="209550"/>
+          </a:xfrm>
+          <a:prstGeom xmlns:a="http://schemas.openxmlformats.org/drawingml/2006/main" prst="rect">
+            <a:avLst/>
+          </a:prstGeom>
+          <a:noFill xmlns:a="http://schemas.openxmlformats.org/drawingml/2006/main"/>
+          <a:ln xmlns:a="http://schemas.openxmlformats.org/drawingml/2006/main" w="0">
+            <a:noFill/>
+          </a:ln>
+        </p:spPr>
+        <p:txBody>
+          <a:bodyPr xmlns:a="http://schemas.openxmlformats.org/drawingml/2006/main" wrap="square" lIns="0" tIns="0" rIns="0" bIns="0" anchor="t"/>
+          <a:lstStyle xmlns:a="http://schemas.openxmlformats.org/drawingml/2006/main"/>
+          <a:p xmlns:a="http://schemas.openxmlformats.org/drawingml/2006/main">
+            <a:pPr algn="r"/>
+            <a:r>
+              <a:rPr lang="en-US" sz="1050">
+                <a:solidFill>
+                  <a:srgbClr val="8DA0B0"/>
+                </a:solidFill>
+                <a:latin typeface="Arial"/>
+                <a:ea typeface="Arial"/>
+              </a:rPr>
+              <a:t>3 / 6</a:t>
+            </a:r>
+            <a:endParaRPr lang="en-US"/>
+          </a:p>
+        </p:txBody>
+      </p:sp>
+    </p:spTree>
+  </p:cSld>
+  <p:clrMapOvr>
+    <a:masterClrMapping xmlns:a="http://schemas.openxmlformats.org/drawingml/2006/main"/>
+  </p:clrMapOvr>
+</p:sld>
+</file>
+
+<file path=ppt/slides/slide4.xml><?xml version="1.0" encoding="utf-8"?>
+<p:sld xmlns:p="http://schemas.openxmlformats.org/presentationml/2006/main">
+  <p:cSld name="Detail">
+    <p:spTree>
+      <p:nvGrpSpPr>
+        <p:cNvPr id="1" name=""/>
+        <p:cNvGrpSpPr/>
+        <p:nvPr/>
+      </p:nvGrpSpPr>
+      <p:grpSpPr>
+        <a:xfrm xmlns:a="http://schemas.openxmlformats.org/drawingml/2006/main">
+          <a:off x="0" y="0"/>
+          <a:ext cx="0" cy="0"/>
+          <a:chOff x="0" y="0"/>
+          <a:chExt cx="0" cy="0"/>
+        </a:xfrm>
+      </p:grpSpPr>
+      <p:sp>
+        <p:nvSpPr>
+          <p:cNvPr id="2" name="background"/>
+          <p:cNvSpPr/>
+          <p:nvPr/>
+        </p:nvSpPr>
+        <p:spPr>
+          <a:xfrm xmlns:a="http://schemas.openxmlformats.org/drawingml/2006/main">
+            <a:off x="0" y="0"/>
+            <a:ext cx="15240000" cy="8572500"/>
+          </a:xfrm>
+          <a:prstGeom xmlns:a="http://schemas.openxmlformats.org/drawingml/2006/main" prst="rect">
+            <a:avLst/>
+          </a:prstGeom>
+          <a:solidFill xmlns:a="http://schemas.openxmlformats.org/drawingml/2006/main">
+            <a:srgbClr val="FAFCFD"/>
+          </a:solidFill>
+          <a:ln xmlns:a="http://schemas.openxmlformats.org/drawingml/2006/main" w="0">
+            <a:solidFill>
+              <a:srgbClr val="FAFCFD"/>
+            </a:solidFill>
+            <a:prstDash val="solid"/>
+          </a:ln>
+        </p:spPr>
+        <p:txBody>
+          <a:bodyPr xmlns:a="http://schemas.openxmlformats.org/drawingml/2006/main" wrap="square" lIns="0" tIns="0" rIns="0" bIns="0" anchor="t"/>
+          <a:lstStyle xmlns:a="http://schemas.openxmlformats.org/drawingml/2006/main"/>
+          <a:p xmlns:a="http://schemas.openxmlformats.org/drawingml/2006/main">
+            <a:r>
+              <a:rPr lang="en-US"/>
+              <a:t/>
+            </a:r>
+            <a:endParaRPr lang="en-US"/>
+          </a:p>
+        </p:txBody>
+      </p:sp>
+      <p:sp>
+        <p:nvSpPr>
+          <p:cNvPr id="3" name="detail-top-rule"/>
+          <p:cNvSpPr/>
+          <p:nvPr/>
+        </p:nvSpPr>
+        <p:spPr>
+          <a:xfrm xmlns:a="http://schemas.openxmlformats.org/drawingml/2006/main">
+            <a:off x="838200" y="666750"/>
+            <a:ext cx="13563600" cy="0"/>
+          </a:xfrm>
+          <a:prstGeom xmlns:a="http://schemas.openxmlformats.org/drawingml/2006/main" prst="line">
+            <a:avLst/>
+          </a:prstGeom>
+          <a:noFill xmlns:a="http://schemas.openxmlformats.org/drawingml/2006/main"/>
+          <a:ln xmlns:a="http://schemas.openxmlformats.org/drawingml/2006/main" w="38100">
+            <a:solidFill>
+              <a:srgbClr val="70508F"/>
+            </a:solidFill>
+            <a:prstDash val="solid"/>
+          </a:ln>
+        </p:spPr>
+        <p:txBody>
+          <a:bodyPr xmlns:a="http://schemas.openxmlformats.org/drawingml/2006/main" wrap="square" lIns="0" tIns="0" rIns="0" bIns="0" anchor="t"/>
+          <a:lstStyle xmlns:a="http://schemas.openxmlformats.org/drawingml/2006/main"/>
+          <a:p xmlns:a="http://schemas.openxmlformats.org/drawingml/2006/main">
+            <a:r>
+              <a:rPr lang="en-US"/>
+              <a:t/>
+            </a:r>
+            <a:endParaRPr lang="en-US"/>
+          </a:p>
+        </p:txBody>
+      </p:sp>
+      <p:sp>
+        <p:nvSpPr>
+          <p:cNvPr id="4" name="LAKE RESEARCH JOURNAL · DETAIL"/>
+          <p:cNvSpPr txBox="1"/>
+          <p:nvPr/>
+        </p:nvSpPr>
+        <p:spPr>
+          <a:xfrm xmlns:a="http://schemas.openxmlformats.org/drawingml/2006/main">
+            <a:off x="914400" y="895350"/>
+            <a:ext cx="7239000" cy="228600"/>
+          </a:xfrm>
+          <a:prstGeom xmlns:a="http://schemas.openxmlformats.org/drawingml/2006/main" prst="rect">
+            <a:avLst/>
+          </a:prstGeom>
+          <a:noFill xmlns:a="http://schemas.openxmlformats.org/drawingml/2006/main"/>
+          <a:ln xmlns:a="http://schemas.openxmlformats.org/drawingml/2006/main" w="0">
+            <a:noFill/>
+          </a:ln>
+        </p:spPr>
+        <p:txBody>
+          <a:bodyPr xmlns:a="http://schemas.openxmlformats.org/drawingml/2006/main" wrap="square" lIns="0" tIns="0" rIns="0" bIns="0" anchor="t"/>
+          <a:lstStyle xmlns:a="http://schemas.openxmlformats.org/drawingml/2006/main"/>
+          <a:p xmlns:a="http://schemas.openxmlformats.org/drawingml/2006/main">
+            <a:r>
+              <a:rPr lang="en-US" sz="1200" b="1">
+                <a:solidFill>
+                  <a:srgbClr val="70508F"/>
+                </a:solidFill>
+                <a:latin typeface="Arial"/>
+                <a:ea typeface="Arial"/>
+              </a:rPr>
+              <a:t>LAKE RESEARCH JOURNAL · DETAIL</a:t>
+            </a:r>
+            <a:endParaRPr lang="en-US"/>
+          </a:p>
+        </p:txBody>
+      </p:sp>
+      <p:sp>
+        <p:nvSpPr>
+          <p:cNvPr id="5" name="detail-title"/>
+          <p:cNvSpPr txBox="1"/>
+          <p:nvPr/>
+        </p:nvSpPr>
+        <p:spPr>
+          <a:xfrm xmlns:a="http://schemas.openxmlformats.org/drawingml/2006/main">
+            <a:off x="914400" y="1314450"/>
+            <a:ext cx="11811000" cy="552450"/>
+          </a:xfrm>
+          <a:prstGeom xmlns:a="http://schemas.openxmlformats.org/drawingml/2006/main" prst="rect">
+            <a:avLst/>
+          </a:prstGeom>
+          <a:noFill xmlns:a="http://schemas.openxmlformats.org/drawingml/2006/main"/>
+          <a:ln xmlns:a="http://schemas.openxmlformats.org/drawingml/2006/main" w="0">
+            <a:noFill/>
+          </a:ln>
+        </p:spPr>
+        <p:txBody>
+          <a:bodyPr xmlns:a="http://schemas.openxmlformats.org/drawingml/2006/main" wrap="square" lIns="0" tIns="0" rIns="0" bIns="0" anchor="t"/>
+          <a:lstStyle xmlns:a="http://schemas.openxmlformats.org/drawingml/2006/main"/>
+          <a:p xmlns:a="http://schemas.openxmlformats.org/drawingml/2006/main">
+            <a:r>
+              <a:rPr lang="en-US" sz="2850" b="1">
+                <a:solidFill>
+                  <a:srgbClr val="173D5C"/>
+                </a:solidFill>
+                <a:latin typeface="Arial"/>
+                <a:ea typeface="Arial"/>
+              </a:rPr>
+              <a:t>The ledger carries the assumptions</a:t>
+            </a:r>
+            <a:endParaRPr lang="en-US"/>
+          </a:p>
+        </p:txBody>
+      </p:sp>
+      <p:sp>
+        <p:nvSpPr>
+          <p:cNvPr id="6" name="detail-basis"/>
+          <p:cNvSpPr txBox="1"/>
+          <p:nvPr/>
+        </p:nvSpPr>
+        <p:spPr>
+          <a:xfrm xmlns:a="http://schemas.openxmlformats.org/drawingml/2006/main">
+            <a:off x="952500" y="1981200"/>
+            <a:ext cx="10477500" cy="266700"/>
+          </a:xfrm>
+          <a:prstGeom xmlns:a="http://schemas.openxmlformats.org/drawingml/2006/main" prst="rect">
+            <a:avLst/>
+          </a:prstGeom>
+          <a:noFill xmlns:a="http://schemas.openxmlformats.org/drawingml/2006/main"/>
+          <a:ln xmlns:a="http://schemas.openxmlformats.org/drawingml/2006/main" w="0">
+            <a:noFill/>
+          </a:ln>
+        </p:spPr>
+        <p:txBody>
+          <a:bodyPr xmlns:a="http://schemas.openxmlformats.org/drawingml/2006/main" wrap="square" lIns="0" tIns="0" rIns="0" bIns="0" anchor="t"/>
+          <a:lstStyle xmlns:a="http://schemas.openxmlformats.org/drawingml/2006/main"/>
+          <a:p xmlns:a="http://schemas.openxmlformats.org/drawingml/2006/main">
+            <a:r>
+              <a:rPr lang="en-US" sz="1350">
+                <a:solidFill>
+                  <a:srgbClr val="8DA0B0"/>
+                </a:solidFill>
+                <a:latin typeface="Arial"/>
+                <a:ea typeface="Arial"/>
+              </a:rPr>
+              <a:t>Assumption grid · values stay aligned to their basis and release gate.</a:t>
+            </a:r>
+            <a:endParaRPr lang="en-US"/>
+          </a:p>
+        </p:txBody>
+      </p:sp>
+      <p:sp>
+        <p:nvSpPr>
+          <p:cNvPr id="7" name="detail-rule"/>
           <p:cNvSpPr/>
           <p:nvPr/>
         </p:nvSpPr>
@@ -2912,1015 +3974,6 @@
       </p:sp>
       <p:sp>
         <p:nvSpPr>
-          <p:cNvPr id="13" name="evidence-band"/>
-          <p:cNvSpPr/>
-          <p:nvPr/>
-        </p:nvSpPr>
-        <p:spPr>
-          <a:xfrm xmlns:a="http://schemas.openxmlformats.org/drawingml/2006/main">
-            <a:off x="914400" y="6877050"/>
-            <a:ext cx="13411200" cy="552450"/>
-          </a:xfrm>
-          <a:prstGeom xmlns:a="http://schemas.openxmlformats.org/drawingml/2006/main" prst="rect">
-            <a:avLst/>
-          </a:prstGeom>
-          <a:solidFill xmlns:a="http://schemas.openxmlformats.org/drawingml/2006/main">
-            <a:srgbClr val="F3F5F8"/>
-          </a:solidFill>
-          <a:ln xmlns:a="http://schemas.openxmlformats.org/drawingml/2006/main" w="0">
-            <a:solidFill>
-              <a:srgbClr val="F3F5F8"/>
-            </a:solidFill>
-            <a:prstDash val="solid"/>
-          </a:ln>
-        </p:spPr>
-        <p:txBody>
-          <a:bodyPr xmlns:a="http://schemas.openxmlformats.org/drawingml/2006/main" wrap="square" lIns="0" tIns="0" rIns="0" bIns="0" anchor="t"/>
-          <a:lstStyle xmlns:a="http://schemas.openxmlformats.org/drawingml/2006/main"/>
-          <a:p xmlns:a="http://schemas.openxmlformats.org/drawingml/2006/main">
-            <a:r>
-              <a:rPr lang="en-US"/>
-              <a:t/>
-            </a:r>
-            <a:endParaRPr lang="en-US"/>
-          </a:p>
-        </p:txBody>
-      </p:sp>
-      <p:sp>
-        <p:nvSpPr>
-          <p:cNvPr id="14" name="evidence-band-text"/>
-          <p:cNvSpPr txBox="1"/>
-          <p:nvPr/>
-        </p:nvSpPr>
-        <p:spPr>
-          <a:xfrm xmlns:a="http://schemas.openxmlformats.org/drawingml/2006/main">
-            <a:off x="1143000" y="7058025"/>
-            <a:ext cx="12382500" cy="228600"/>
-          </a:xfrm>
-          <a:prstGeom xmlns:a="http://schemas.openxmlformats.org/drawingml/2006/main" prst="rect">
-            <a:avLst/>
-          </a:prstGeom>
-          <a:noFill xmlns:a="http://schemas.openxmlformats.org/drawingml/2006/main"/>
-          <a:ln xmlns:a="http://schemas.openxmlformats.org/drawingml/2006/main" w="0">
-            <a:noFill/>
-          </a:ln>
-        </p:spPr>
-        <p:txBody>
-          <a:bodyPr xmlns:a="http://schemas.openxmlformats.org/drawingml/2006/main" wrap="square" lIns="0" tIns="0" rIns="0" bIns="0" anchor="t"/>
-          <a:lstStyle xmlns:a="http://schemas.openxmlformats.org/drawingml/2006/main"/>
-          <a:p xmlns:a="http://schemas.openxmlformats.org/drawingml/2006/main">
-            <a:r>
-              <a:rPr lang="en-US" sz="1275" b="1">
-                <a:solidFill>
-                  <a:srgbClr val="173D5C"/>
-                </a:solidFill>
-                <a:latin typeface="Arial"/>
-                <a:ea typeface="Arial"/>
-              </a:rPr>
-              <a:t>EVIDENCE  ·  Keep the unit, time window, and limitation adjacent to the number.</a:t>
-            </a:r>
-            <a:endParaRPr lang="en-US"/>
-          </a:p>
-        </p:txBody>
-      </p:sp>
-      <p:sp>
-        <p:nvSpPr>
-          <p:cNvPr id="15" name="source"/>
-          <p:cNvSpPr txBox="1"/>
-          <p:nvPr/>
-        </p:nvSpPr>
-        <p:spPr>
-          <a:xfrm xmlns:a="http://schemas.openxmlformats.org/drawingml/2006/main">
-            <a:off x="914400" y="7829550"/>
-            <a:ext cx="10953750" cy="209550"/>
-          </a:xfrm>
-          <a:prstGeom xmlns:a="http://schemas.openxmlformats.org/drawingml/2006/main" prst="rect">
-            <a:avLst/>
-          </a:prstGeom>
-          <a:noFill xmlns:a="http://schemas.openxmlformats.org/drawingml/2006/main"/>
-          <a:ln xmlns:a="http://schemas.openxmlformats.org/drawingml/2006/main" w="0">
-            <a:noFill/>
-          </a:ln>
-        </p:spPr>
-        <p:txBody>
-          <a:bodyPr xmlns:a="http://schemas.openxmlformats.org/drawingml/2006/main" wrap="square" lIns="0" tIns="0" rIns="0" bIns="0" anchor="t"/>
-          <a:lstStyle xmlns:a="http://schemas.openxmlformats.org/drawingml/2006/main"/>
-          <a:p xmlns:a="http://schemas.openxmlformats.org/drawingml/2006/main">
-            <a:r>
-              <a:rPr lang="en-US" sz="1050">
-                <a:solidFill>
-                  <a:srgbClr val="8DA0B0"/>
-                </a:solidFill>
-                <a:latin typeface="Arial"/>
-                <a:ea typeface="Arial"/>
-              </a:rPr>
-              <a:t>Source: illustrative calibration brief · values are fictional</a:t>
-            </a:r>
-            <a:endParaRPr lang="en-US"/>
-          </a:p>
-        </p:txBody>
-      </p:sp>
-      <p:sp>
-        <p:nvSpPr>
-          <p:cNvPr id="16" name="page-number"/>
-          <p:cNvSpPr txBox="1"/>
-          <p:nvPr/>
-        </p:nvSpPr>
-        <p:spPr>
-          <a:xfrm xmlns:a="http://schemas.openxmlformats.org/drawingml/2006/main">
-            <a:off x="13335000" y="7829550"/>
-            <a:ext cx="952500" cy="209550"/>
-          </a:xfrm>
-          <a:prstGeom xmlns:a="http://schemas.openxmlformats.org/drawingml/2006/main" prst="rect">
-            <a:avLst/>
-          </a:prstGeom>
-          <a:noFill xmlns:a="http://schemas.openxmlformats.org/drawingml/2006/main"/>
-          <a:ln xmlns:a="http://schemas.openxmlformats.org/drawingml/2006/main" w="0">
-            <a:noFill/>
-          </a:ln>
-        </p:spPr>
-        <p:txBody>
-          <a:bodyPr xmlns:a="http://schemas.openxmlformats.org/drawingml/2006/main" wrap="square" lIns="0" tIns="0" rIns="0" bIns="0" anchor="t"/>
-          <a:lstStyle xmlns:a="http://schemas.openxmlformats.org/drawingml/2006/main"/>
-          <a:p xmlns:a="http://schemas.openxmlformats.org/drawingml/2006/main">
-            <a:pPr algn="r"/>
-            <a:r>
-              <a:rPr lang="en-US" sz="1050">
-                <a:solidFill>
-                  <a:srgbClr val="8DA0B0"/>
-                </a:solidFill>
-                <a:latin typeface="Arial"/>
-                <a:ea typeface="Arial"/>
-              </a:rPr>
-              <a:t>3 / 6</a:t>
-            </a:r>
-            <a:endParaRPr lang="en-US"/>
-          </a:p>
-        </p:txBody>
-      </p:sp>
-    </p:spTree>
-  </p:cSld>
-  <p:clrMapOvr>
-    <a:masterClrMapping xmlns:a="http://schemas.openxmlformats.org/drawingml/2006/main"/>
-  </p:clrMapOvr>
-</p:sld>
-</file>
-
-<file path=ppt/slides/slide4.xml><?xml version="1.0" encoding="utf-8"?>
-<p:sld xmlns:p="http://schemas.openxmlformats.org/presentationml/2006/main">
-  <p:cSld name="Detail">
-    <p:spTree>
-      <p:nvGrpSpPr>
-        <p:cNvPr id="1" name=""/>
-        <p:cNvGrpSpPr/>
-        <p:nvPr/>
-      </p:nvGrpSpPr>
-      <p:grpSpPr>
-        <a:xfrm xmlns:a="http://schemas.openxmlformats.org/drawingml/2006/main">
-          <a:off x="0" y="0"/>
-          <a:ext cx="0" cy="0"/>
-          <a:chOff x="0" y="0"/>
-          <a:chExt cx="0" cy="0"/>
-        </a:xfrm>
-      </p:grpSpPr>
-      <p:sp>
-        <p:nvSpPr>
-          <p:cNvPr id="2" name="background"/>
-          <p:cNvSpPr/>
-          <p:nvPr/>
-        </p:nvSpPr>
-        <p:spPr>
-          <a:xfrm xmlns:a="http://schemas.openxmlformats.org/drawingml/2006/main">
-            <a:off x="0" y="0"/>
-            <a:ext cx="15240000" cy="8572500"/>
-          </a:xfrm>
-          <a:prstGeom xmlns:a="http://schemas.openxmlformats.org/drawingml/2006/main" prst="rect">
-            <a:avLst/>
-          </a:prstGeom>
-          <a:solidFill xmlns:a="http://schemas.openxmlformats.org/drawingml/2006/main">
-            <a:srgbClr val="FAFCFD"/>
-          </a:solidFill>
-          <a:ln xmlns:a="http://schemas.openxmlformats.org/drawingml/2006/main" w="0">
-            <a:solidFill>
-              <a:srgbClr val="FAFCFD"/>
-            </a:solidFill>
-            <a:prstDash val="solid"/>
-          </a:ln>
-        </p:spPr>
-        <p:txBody>
-          <a:bodyPr xmlns:a="http://schemas.openxmlformats.org/drawingml/2006/main" wrap="square" lIns="0" tIns="0" rIns="0" bIns="0" anchor="t"/>
-          <a:lstStyle xmlns:a="http://schemas.openxmlformats.org/drawingml/2006/main"/>
-          <a:p xmlns:a="http://schemas.openxmlformats.org/drawingml/2006/main">
-            <a:r>
-              <a:rPr lang="en-US"/>
-              <a:t/>
-            </a:r>
-            <a:endParaRPr lang="en-US"/>
-          </a:p>
-        </p:txBody>
-      </p:sp>
-      <p:sp>
-        <p:nvSpPr>
-          <p:cNvPr id="3" name="detail-top-rule"/>
-          <p:cNvSpPr/>
-          <p:nvPr/>
-        </p:nvSpPr>
-        <p:spPr>
-          <a:xfrm xmlns:a="http://schemas.openxmlformats.org/drawingml/2006/main">
-            <a:off x="838200" y="666750"/>
-            <a:ext cx="13563600" cy="0"/>
-          </a:xfrm>
-          <a:prstGeom xmlns:a="http://schemas.openxmlformats.org/drawingml/2006/main" prst="line">
-            <a:avLst/>
-          </a:prstGeom>
-          <a:noFill xmlns:a="http://schemas.openxmlformats.org/drawingml/2006/main"/>
-          <a:ln xmlns:a="http://schemas.openxmlformats.org/drawingml/2006/main" w="38100">
-            <a:solidFill>
-              <a:srgbClr val="70508F"/>
-            </a:solidFill>
-            <a:prstDash val="solid"/>
-          </a:ln>
-        </p:spPr>
-        <p:txBody>
-          <a:bodyPr xmlns:a="http://schemas.openxmlformats.org/drawingml/2006/main" wrap="square" lIns="0" tIns="0" rIns="0" bIns="0" anchor="t"/>
-          <a:lstStyle xmlns:a="http://schemas.openxmlformats.org/drawingml/2006/main"/>
-          <a:p xmlns:a="http://schemas.openxmlformats.org/drawingml/2006/main">
-            <a:r>
-              <a:rPr lang="en-US"/>
-              <a:t/>
-            </a:r>
-            <a:endParaRPr lang="en-US"/>
-          </a:p>
-        </p:txBody>
-      </p:sp>
-      <p:sp>
-        <p:nvSpPr>
-          <p:cNvPr id="4" name="LAKE RESEARCH JOURNAL · DETAIL"/>
-          <p:cNvSpPr txBox="1"/>
-          <p:nvPr/>
-        </p:nvSpPr>
-        <p:spPr>
-          <a:xfrm xmlns:a="http://schemas.openxmlformats.org/drawingml/2006/main">
-            <a:off x="914400" y="895350"/>
-            <a:ext cx="7239000" cy="228600"/>
-          </a:xfrm>
-          <a:prstGeom xmlns:a="http://schemas.openxmlformats.org/drawingml/2006/main" prst="rect">
-            <a:avLst/>
-          </a:prstGeom>
-          <a:noFill xmlns:a="http://schemas.openxmlformats.org/drawingml/2006/main"/>
-          <a:ln xmlns:a="http://schemas.openxmlformats.org/drawingml/2006/main" w="0">
-            <a:noFill/>
-          </a:ln>
-        </p:spPr>
-        <p:txBody>
-          <a:bodyPr xmlns:a="http://schemas.openxmlformats.org/drawingml/2006/main" wrap="square" lIns="0" tIns="0" rIns="0" bIns="0" anchor="t"/>
-          <a:lstStyle xmlns:a="http://schemas.openxmlformats.org/drawingml/2006/main"/>
-          <a:p xmlns:a="http://schemas.openxmlformats.org/drawingml/2006/main">
-            <a:r>
-              <a:rPr lang="en-US" sz="1200" b="1">
-                <a:solidFill>
-                  <a:srgbClr val="70508F"/>
-                </a:solidFill>
-                <a:latin typeface="Arial"/>
-                <a:ea typeface="Arial"/>
-              </a:rPr>
-              <a:t>LAKE RESEARCH JOURNAL · DETAIL</a:t>
-            </a:r>
-            <a:endParaRPr lang="en-US"/>
-          </a:p>
-        </p:txBody>
-      </p:sp>
-      <p:sp>
-        <p:nvSpPr>
-          <p:cNvPr id="5" name="detail-title"/>
-          <p:cNvSpPr txBox="1"/>
-          <p:nvPr/>
-        </p:nvSpPr>
-        <p:spPr>
-          <a:xfrm xmlns:a="http://schemas.openxmlformats.org/drawingml/2006/main">
-            <a:off x="914400" y="1314450"/>
-            <a:ext cx="11811000" cy="552450"/>
-          </a:xfrm>
-          <a:prstGeom xmlns:a="http://schemas.openxmlformats.org/drawingml/2006/main" prst="rect">
-            <a:avLst/>
-          </a:prstGeom>
-          <a:noFill xmlns:a="http://schemas.openxmlformats.org/drawingml/2006/main"/>
-          <a:ln xmlns:a="http://schemas.openxmlformats.org/drawingml/2006/main" w="0">
-            <a:noFill/>
-          </a:ln>
-        </p:spPr>
-        <p:txBody>
-          <a:bodyPr xmlns:a="http://schemas.openxmlformats.org/drawingml/2006/main" wrap="square" lIns="0" tIns="0" rIns="0" bIns="0" anchor="t"/>
-          <a:lstStyle xmlns:a="http://schemas.openxmlformats.org/drawingml/2006/main"/>
-          <a:p xmlns:a="http://schemas.openxmlformats.org/drawingml/2006/main">
-            <a:r>
-              <a:rPr lang="en-US" sz="2850" b="1">
-                <a:solidFill>
-                  <a:srgbClr val="173D5C"/>
-                </a:solidFill>
-                <a:latin typeface="Arial"/>
-                <a:ea typeface="Arial"/>
-              </a:rPr>
-              <a:t>The ledger carries the assumptions</a:t>
-            </a:r>
-            <a:endParaRPr lang="en-US"/>
-          </a:p>
-        </p:txBody>
-      </p:sp>
-      <p:sp>
-        <p:nvSpPr>
-          <p:cNvPr id="6" name="detail-basis"/>
-          <p:cNvSpPr txBox="1"/>
-          <p:nvPr/>
-        </p:nvSpPr>
-        <p:spPr>
-          <a:xfrm xmlns:a="http://schemas.openxmlformats.org/drawingml/2006/main">
-            <a:off x="952500" y="1981200"/>
-            <a:ext cx="10477500" cy="266700"/>
-          </a:xfrm>
-          <a:prstGeom xmlns:a="http://schemas.openxmlformats.org/drawingml/2006/main" prst="rect">
-            <a:avLst/>
-          </a:prstGeom>
-          <a:noFill xmlns:a="http://schemas.openxmlformats.org/drawingml/2006/main"/>
-          <a:ln xmlns:a="http://schemas.openxmlformats.org/drawingml/2006/main" w="0">
-            <a:noFill/>
-          </a:ln>
-        </p:spPr>
-        <p:txBody>
-          <a:bodyPr xmlns:a="http://schemas.openxmlformats.org/drawingml/2006/main" wrap="square" lIns="0" tIns="0" rIns="0" bIns="0" anchor="t"/>
-          <a:lstStyle xmlns:a="http://schemas.openxmlformats.org/drawingml/2006/main"/>
-          <a:p xmlns:a="http://schemas.openxmlformats.org/drawingml/2006/main">
-            <a:r>
-              <a:rPr lang="en-US" sz="1350">
-                <a:solidFill>
-                  <a:srgbClr val="8DA0B0"/>
-                </a:solidFill>
-                <a:latin typeface="Arial"/>
-                <a:ea typeface="Arial"/>
-              </a:rPr>
-              <a:t>Assumption grid · values stay aligned to their basis and release gate.</a:t>
-            </a:r>
-            <a:endParaRPr lang="en-US"/>
-          </a:p>
-        </p:txBody>
-      </p:sp>
-      <p:sp>
-        <p:nvSpPr>
-          <p:cNvPr id="7" name="detail-rule"/>
-          <p:cNvSpPr/>
-          <p:nvPr/>
-        </p:nvSpPr>
-        <p:spPr>
-          <a:xfrm xmlns:a="http://schemas.openxmlformats.org/drawingml/2006/main">
-            <a:off x="914400" y="2457450"/>
-            <a:ext cx="13411200" cy="0"/>
-          </a:xfrm>
-          <a:prstGeom xmlns:a="http://schemas.openxmlformats.org/drawingml/2006/main" prst="line">
-            <a:avLst/>
-          </a:prstGeom>
-          <a:noFill xmlns:a="http://schemas.openxmlformats.org/drawingml/2006/main"/>
-          <a:ln xmlns:a="http://schemas.openxmlformats.org/drawingml/2006/main" w="25400">
-            <a:solidFill>
-              <a:srgbClr val="8DA0B0"/>
-            </a:solidFill>
-            <a:prstDash val="solid"/>
-          </a:ln>
-        </p:spPr>
-        <p:txBody>
-          <a:bodyPr xmlns:a="http://schemas.openxmlformats.org/drawingml/2006/main" wrap="square" lIns="0" tIns="0" rIns="0" bIns="0" anchor="t"/>
-          <a:lstStyle xmlns:a="http://schemas.openxmlformats.org/drawingml/2006/main"/>
-          <a:p xmlns:a="http://schemas.openxmlformats.org/drawingml/2006/main">
-            <a:r>
-              <a:rPr lang="en-US"/>
-              <a:t/>
-            </a:r>
-            <a:endParaRPr lang="en-US"/>
-          </a:p>
-        </p:txBody>
-      </p:sp>
-      <p:graphicFrame>
-        <p:nvGraphicFramePr>
-          <p:cNvPr id="8" name="finance-evidence-table"/>
-          <p:cNvGraphicFramePr>
-            <a:graphicFrameLocks xmlns:a="http://schemas.openxmlformats.org/drawingml/2006/main" noGrp="1"/>
-          </p:cNvGraphicFramePr>
-          <p:nvPr/>
-        </p:nvGraphicFramePr>
-        <p:xfrm>
-          <a:off xmlns:a="http://schemas.openxmlformats.org/drawingml/2006/main" x="990600" y="3162300"/>
-          <a:ext xmlns:a="http://schemas.openxmlformats.org/drawingml/2006/main" cx="8001000" cy="2895600"/>
-        </p:xfrm>
-        <a:graphic xmlns:a="http://schemas.openxmlformats.org/drawingml/2006/main">
-          <a:graphicData uri="http://schemas.openxmlformats.org/drawingml/2006/table">
-            <a:tbl>
-              <a:tblPr firstRow="1"/>
-              <a:tblGrid>
-                <a:gridCol w="2000250"/>
-                <a:gridCol w="2000250"/>
-                <a:gridCol w="2000250"/>
-                <a:gridCol w="2000250"/>
-              </a:tblGrid>
-              <a:tr h="579120">
-                <a:tc>
-                  <a:txBody>
-                    <a:bodyPr/>
-                    <a:lstStyle/>
-                    <a:p>
-                      <a:r>
-                        <a:rPr lang="en-US" sz="1350" b="1">
-                          <a:solidFill>
-                            <a:srgbClr val="000000"/>
-                          </a:solidFill>
-                        </a:rPr>
-                        <a:t>Metric</a:t>
-                      </a:r>
-                      <a:endParaRPr lang="en-US" sz="1350"/>
-                    </a:p>
-                  </a:txBody>
-                  <a:tcPr>
-                    <a:solidFill>
-                      <a:srgbClr val="EDEDED"/>
-                    </a:solidFill>
-                  </a:tcPr>
-                </a:tc>
-                <a:tc>
-                  <a:txBody>
-                    <a:bodyPr/>
-                    <a:lstStyle/>
-                    <a:p>
-                      <a:r>
-                        <a:rPr lang="en-US" sz="1350" b="1">
-                          <a:solidFill>
-                            <a:srgbClr val="000000"/>
-                          </a:solidFill>
-                        </a:rPr>
-                        <a:t>Base</a:t>
-                      </a:r>
-                      <a:endParaRPr lang="en-US" sz="1350"/>
-                    </a:p>
-                  </a:txBody>
-                  <a:tcPr>
-                    <a:solidFill>
-                      <a:srgbClr val="EDEDED"/>
-                    </a:solidFill>
-                  </a:tcPr>
-                </a:tc>
-                <a:tc>
-                  <a:txBody>
-                    <a:bodyPr/>
-                    <a:lstStyle/>
-                    <a:p>
-                      <a:r>
-                        <a:rPr lang="en-US" sz="1350" b="1">
-                          <a:solidFill>
-                            <a:srgbClr val="000000"/>
-                          </a:solidFill>
-                        </a:rPr>
-                        <a:t>Plan</a:t>
-                      </a:r>
-                      <a:endParaRPr lang="en-US" sz="1350"/>
-                    </a:p>
-                  </a:txBody>
-                  <a:tcPr>
-                    <a:solidFill>
-                      <a:srgbClr val="EDEDED"/>
-                    </a:solidFill>
-                  </a:tcPr>
-                </a:tc>
-                <a:tc>
-                  <a:txBody>
-                    <a:bodyPr/>
-                    <a:lstStyle/>
-                    <a:p>
-                      <a:r>
-                        <a:rPr lang="en-US" sz="1350" b="1">
-                          <a:solidFill>
-                            <a:srgbClr val="000000"/>
-                          </a:solidFill>
-                        </a:rPr>
-                        <a:t>Delta</a:t>
-                      </a:r>
-                      <a:endParaRPr lang="en-US" sz="1350"/>
-                    </a:p>
-                  </a:txBody>
-                  <a:tcPr>
-                    <a:solidFill>
-                      <a:srgbClr val="EDEDED"/>
-                    </a:solidFill>
-                  </a:tcPr>
-                </a:tc>
-              </a:tr>
-              <a:tr h="579120">
-                <a:tc>
-                  <a:txBody>
-                    <a:bodyPr/>
-                    <a:lstStyle/>
-                    <a:p>
-                      <a:r>
-                        <a:rPr lang="en-US" sz="1350" b="0">
-                          <a:solidFill>
-                            <a:srgbClr val="0F172A"/>
-                          </a:solidFill>
-                        </a:rPr>
-                        <a:t>Coverage</a:t>
-                      </a:r>
-                      <a:endParaRPr lang="en-US" sz="1350"/>
-                    </a:p>
-                  </a:txBody>
-                  <a:tcPr>
-                    <a:solidFill>
-                      <a:srgbClr val="FFFFFF"/>
-                    </a:solidFill>
-                  </a:tcPr>
-                </a:tc>
-                <a:tc>
-                  <a:txBody>
-                    <a:bodyPr/>
-                    <a:lstStyle/>
-                    <a:p>
-                      <a:r>
-                        <a:rPr lang="en-US" sz="1350" b="0">
-                          <a:solidFill>
-                            <a:srgbClr val="0F172A"/>
-                          </a:solidFill>
-                        </a:rPr>
-                        <a:t>42</a:t>
-                      </a:r>
-                      <a:endParaRPr lang="en-US" sz="1350"/>
-                    </a:p>
-                  </a:txBody>
-                  <a:tcPr>
-                    <a:solidFill>
-                      <a:srgbClr val="FFFFFF"/>
-                    </a:solidFill>
-                  </a:tcPr>
-                </a:tc>
-                <a:tc>
-                  <a:txBody>
-                    <a:bodyPr/>
-                    <a:lstStyle/>
-                    <a:p>
-                      <a:r>
-                        <a:rPr lang="en-US" sz="1350" b="0">
-                          <a:solidFill>
-                            <a:srgbClr val="0F172A"/>
-                          </a:solidFill>
-                        </a:rPr>
-                        <a:t>51</a:t>
-                      </a:r>
-                      <a:endParaRPr lang="en-US" sz="1350"/>
-                    </a:p>
-                  </a:txBody>
-                  <a:tcPr>
-                    <a:solidFill>
-                      <a:srgbClr val="FFFFFF"/>
-                    </a:solidFill>
-                  </a:tcPr>
-                </a:tc>
-                <a:tc>
-                  <a:txBody>
-                    <a:bodyPr/>
-                    <a:lstStyle/>
-                    <a:p>
-                      <a:r>
-                        <a:rPr lang="en-US" sz="1350" b="0">
-                          <a:solidFill>
-                            <a:srgbClr val="0F172A"/>
-                          </a:solidFill>
-                        </a:rPr>
-                        <a:t>+9</a:t>
-                      </a:r>
-                      <a:endParaRPr lang="en-US" sz="1350"/>
-                    </a:p>
-                  </a:txBody>
-                  <a:tcPr>
-                    <a:solidFill>
-                      <a:srgbClr val="FFFFFF"/>
-                    </a:solidFill>
-                  </a:tcPr>
-                </a:tc>
-              </a:tr>
-              <a:tr h="579120">
-                <a:tc>
-                  <a:txBody>
-                    <a:bodyPr/>
-                    <a:lstStyle/>
-                    <a:p>
-                      <a:r>
-                        <a:rPr lang="en-US" sz="1350" b="0">
-                          <a:solidFill>
-                            <a:srgbClr val="0F172A"/>
-                          </a:solidFill>
-                        </a:rPr>
-                        <a:t>Cash conversion</a:t>
-                      </a:r>
-                      <a:endParaRPr lang="en-US" sz="1350"/>
-                    </a:p>
-                  </a:txBody>
-                  <a:tcPr>
-                    <a:solidFill>
-                      <a:srgbClr val="FFFFFF"/>
-                    </a:solidFill>
-                  </a:tcPr>
-                </a:tc>
-                <a:tc>
-                  <a:txBody>
-                    <a:bodyPr/>
-                    <a:lstStyle/>
-                    <a:p>
-                      <a:r>
-                        <a:rPr lang="en-US" sz="1350" b="0">
-                          <a:solidFill>
-                            <a:srgbClr val="0F172A"/>
-                          </a:solidFill>
-                        </a:rPr>
-                        <a:t>1.6x</a:t>
-                      </a:r>
-                      <a:endParaRPr lang="en-US" sz="1350"/>
-                    </a:p>
-                  </a:txBody>
-                  <a:tcPr>
-                    <a:solidFill>
-                      <a:srgbClr val="FFFFFF"/>
-                    </a:solidFill>
-                  </a:tcPr>
-                </a:tc>
-                <a:tc>
-                  <a:txBody>
-                    <a:bodyPr/>
-                    <a:lstStyle/>
-                    <a:p>
-                      <a:r>
-                        <a:rPr lang="en-US" sz="1350" b="0">
-                          <a:solidFill>
-                            <a:srgbClr val="0F172A"/>
-                          </a:solidFill>
-                        </a:rPr>
-                        <a:t>2.1x</a:t>
-                      </a:r>
-                      <a:endParaRPr lang="en-US" sz="1350"/>
-                    </a:p>
-                  </a:txBody>
-                  <a:tcPr>
-                    <a:solidFill>
-                      <a:srgbClr val="FFFFFF"/>
-                    </a:solidFill>
-                  </a:tcPr>
-                </a:tc>
-                <a:tc>
-                  <a:txBody>
-                    <a:bodyPr/>
-                    <a:lstStyle/>
-                    <a:p>
-                      <a:r>
-                        <a:rPr lang="en-US" sz="1350" b="0">
-                          <a:solidFill>
-                            <a:srgbClr val="0F172A"/>
-                          </a:solidFill>
-                        </a:rPr>
-                        <a:t>+0.5x</a:t>
-                      </a:r>
-                      <a:endParaRPr lang="en-US" sz="1350"/>
-                    </a:p>
-                  </a:txBody>
-                  <a:tcPr>
-                    <a:solidFill>
-                      <a:srgbClr val="FFFFFF"/>
-                    </a:solidFill>
-                  </a:tcPr>
-                </a:tc>
-              </a:tr>
-              <a:tr h="579120">
-                <a:tc>
-                  <a:txBody>
-                    <a:bodyPr/>
-                    <a:lstStyle/>
-                    <a:p>
-                      <a:r>
-                        <a:rPr lang="en-US" sz="1350" b="0">
-                          <a:solidFill>
-                            <a:srgbClr val="0F172A"/>
-                          </a:solidFill>
-                        </a:rPr>
-                        <a:t>Risk buffer</a:t>
-                      </a:r>
-                      <a:endParaRPr lang="en-US" sz="1350"/>
-                    </a:p>
-                  </a:txBody>
-                  <a:tcPr>
-                    <a:solidFill>
-                      <a:srgbClr val="FFFFFF"/>
-                    </a:solidFill>
-                  </a:tcPr>
-                </a:tc>
-                <a:tc>
-                  <a:txBody>
-                    <a:bodyPr/>
-                    <a:lstStyle/>
-                    <a:p>
-                      <a:r>
-                        <a:rPr lang="en-US" sz="1350" b="0">
-                          <a:solidFill>
-                            <a:srgbClr val="0F172A"/>
-                          </a:solidFill>
-                        </a:rPr>
-                        <a:t>8w</a:t>
-                      </a:r>
-                      <a:endParaRPr lang="en-US" sz="1350"/>
-                    </a:p>
-                  </a:txBody>
-                  <a:tcPr>
-                    <a:solidFill>
-                      <a:srgbClr val="FFFFFF"/>
-                    </a:solidFill>
-                  </a:tcPr>
-                </a:tc>
-                <a:tc>
-                  <a:txBody>
-                    <a:bodyPr/>
-                    <a:lstStyle/>
-                    <a:p>
-                      <a:r>
-                        <a:rPr lang="en-US" sz="1350" b="0">
-                          <a:solidFill>
-                            <a:srgbClr val="0F172A"/>
-                          </a:solidFill>
-                        </a:rPr>
-                        <a:t>10w</a:t>
-                      </a:r>
-                      <a:endParaRPr lang="en-US" sz="1350"/>
-                    </a:p>
-                  </a:txBody>
-                  <a:tcPr>
-                    <a:solidFill>
-                      <a:srgbClr val="FFFFFF"/>
-                    </a:solidFill>
-                  </a:tcPr>
-                </a:tc>
-                <a:tc>
-                  <a:txBody>
-                    <a:bodyPr/>
-                    <a:lstStyle/>
-                    <a:p>
-                      <a:r>
-                        <a:rPr lang="en-US" sz="1350" b="0">
-                          <a:solidFill>
-                            <a:srgbClr val="0F172A"/>
-                          </a:solidFill>
-                        </a:rPr>
-                        <a:t>+2w</a:t>
-                      </a:r>
-                      <a:endParaRPr lang="en-US" sz="1350"/>
-                    </a:p>
-                  </a:txBody>
-                  <a:tcPr>
-                    <a:solidFill>
-                      <a:srgbClr val="FFFFFF"/>
-                    </a:solidFill>
-                  </a:tcPr>
-                </a:tc>
-              </a:tr>
-              <a:tr h="579120">
-                <a:tc>
-                  <a:txBody>
-                    <a:bodyPr/>
-                    <a:lstStyle/>
-                    <a:p>
-                      <a:r>
-                        <a:rPr lang="en-US" sz="1350" b="0">
-                          <a:solidFill>
-                            <a:srgbClr val="0F172A"/>
-                          </a:solidFill>
-                        </a:rPr>
-                        <a:t>Release gate</a:t>
-                      </a:r>
-                      <a:endParaRPr lang="en-US" sz="1350"/>
-                    </a:p>
-                  </a:txBody>
-                  <a:tcPr>
-                    <a:solidFill>
-                      <a:srgbClr val="FFFFFF"/>
-                    </a:solidFill>
-                  </a:tcPr>
-                </a:tc>
-                <a:tc>
-                  <a:txBody>
-                    <a:bodyPr/>
-                    <a:lstStyle/>
-                    <a:p>
-                      <a:r>
-                        <a:rPr lang="en-US" sz="1350" b="0">
-                          <a:solidFill>
-                            <a:srgbClr val="0F172A"/>
-                          </a:solidFill>
-                        </a:rPr>
-                        <a:t>Open</a:t>
-                      </a:r>
-                      <a:endParaRPr lang="en-US" sz="1350"/>
-                    </a:p>
-                  </a:txBody>
-                  <a:tcPr>
-                    <a:solidFill>
-                      <a:srgbClr val="FFFFFF"/>
-                    </a:solidFill>
-                  </a:tcPr>
-                </a:tc>
-                <a:tc>
-                  <a:txBody>
-                    <a:bodyPr/>
-                    <a:lstStyle/>
-                    <a:p>
-                      <a:r>
-                        <a:rPr lang="en-US" sz="1350" b="0">
-                          <a:solidFill>
-                            <a:srgbClr val="0F172A"/>
-                          </a:solidFill>
-                        </a:rPr>
-                        <a:t>Clear</a:t>
-                      </a:r>
-                      <a:endParaRPr lang="en-US" sz="1350"/>
-                    </a:p>
-                  </a:txBody>
-                  <a:tcPr>
-                    <a:solidFill>
-                      <a:srgbClr val="FFFFFF"/>
-                    </a:solidFill>
-                  </a:tcPr>
-                </a:tc>
-                <a:tc>
-                  <a:txBody>
-                    <a:bodyPr/>
-                    <a:lstStyle/>
-                    <a:p>
-                      <a:r>
-                        <a:rPr lang="en-US" sz="1350" b="0">
-                          <a:solidFill>
-                            <a:srgbClr val="0F172A"/>
-                          </a:solidFill>
-                        </a:rPr>
-                        <a:t>—</a:t>
-                      </a:r>
-                      <a:endParaRPr lang="en-US" sz="1350"/>
-                    </a:p>
-                  </a:txBody>
-                  <a:tcPr>
-                    <a:solidFill>
-                      <a:srgbClr val="FFFFFF"/>
-                    </a:solidFill>
-                  </a:tcPr>
-                </a:tc>
-              </a:tr>
-            </a:tbl>
-          </a:graphicData>
-        </a:graphic>
-      </p:graphicFrame>
-      <p:sp>
-        <p:nvSpPr>
-          <p:cNvPr id="9" name="table-note-label"/>
-          <p:cNvSpPr txBox="1"/>
-          <p:nvPr/>
-        </p:nvSpPr>
-        <p:spPr>
-          <a:xfrm xmlns:a="http://schemas.openxmlformats.org/drawingml/2006/main">
-            <a:off x="9810750" y="3314700"/>
-            <a:ext cx="3429000" cy="228600"/>
-          </a:xfrm>
-          <a:prstGeom xmlns:a="http://schemas.openxmlformats.org/drawingml/2006/main" prst="rect">
-            <a:avLst/>
-          </a:prstGeom>
-          <a:noFill xmlns:a="http://schemas.openxmlformats.org/drawingml/2006/main"/>
-          <a:ln xmlns:a="http://schemas.openxmlformats.org/drawingml/2006/main" w="0">
-            <a:noFill/>
-          </a:ln>
-        </p:spPr>
-        <p:txBody>
-          <a:bodyPr xmlns:a="http://schemas.openxmlformats.org/drawingml/2006/main" wrap="square" lIns="0" tIns="0" rIns="0" bIns="0" anchor="t"/>
-          <a:lstStyle xmlns:a="http://schemas.openxmlformats.org/drawingml/2006/main"/>
-          <a:p xmlns:a="http://schemas.openxmlformats.org/drawingml/2006/main">
-            <a:r>
-              <a:rPr lang="en-US" sz="1125" b="1">
-                <a:solidFill>
-                  <a:srgbClr val="70508F"/>
-                </a:solidFill>
-                <a:latin typeface="Arial"/>
-                <a:ea typeface="Arial"/>
-              </a:rPr>
-              <a:t>MODEL READ-THROUGH</a:t>
-            </a:r>
-            <a:endParaRPr lang="en-US"/>
-          </a:p>
-        </p:txBody>
-      </p:sp>
-      <p:sp>
-        <p:nvSpPr>
-          <p:cNvPr id="10" name="table-note-title"/>
-          <p:cNvSpPr txBox="1"/>
-          <p:nvPr/>
-        </p:nvSpPr>
-        <p:spPr>
-          <a:xfrm xmlns:a="http://schemas.openxmlformats.org/drawingml/2006/main">
-            <a:off x="9810750" y="3790950"/>
-            <a:ext cx="3619500" cy="819150"/>
-          </a:xfrm>
-          <a:prstGeom xmlns:a="http://schemas.openxmlformats.org/drawingml/2006/main" prst="rect">
-            <a:avLst/>
-          </a:prstGeom>
-          <a:noFill xmlns:a="http://schemas.openxmlformats.org/drawingml/2006/main"/>
-          <a:ln xmlns:a="http://schemas.openxmlformats.org/drawingml/2006/main" w="0">
-            <a:noFill/>
-          </a:ln>
-        </p:spPr>
-        <p:txBody>
-          <a:bodyPr xmlns:a="http://schemas.openxmlformats.org/drawingml/2006/main" wrap="square" lIns="0" tIns="0" rIns="0" bIns="0" anchor="t"/>
-          <a:lstStyle xmlns:a="http://schemas.openxmlformats.org/drawingml/2006/main"/>
-          <a:p xmlns:a="http://schemas.openxmlformats.org/drawingml/2006/main">
-            <a:r>
-              <a:rPr lang="en-US" sz="2100" b="1">
-                <a:solidFill>
-                  <a:srgbClr val="173D5C"/>
-                </a:solidFill>
-                <a:latin typeface="Arial"/>
-                <a:ea typeface="Arial"/>
-              </a:rPr>
-              <a:t>The gate stays visible beside the number.</a:t>
-            </a:r>
-            <a:endParaRPr lang="en-US"/>
-          </a:p>
-        </p:txBody>
-      </p:sp>
-      <p:sp>
-        <p:nvSpPr>
-          <p:cNvPr id="11" name="table-note-rule"/>
-          <p:cNvSpPr/>
-          <p:nvPr/>
-        </p:nvSpPr>
-        <p:spPr>
-          <a:xfrm xmlns:a="http://schemas.openxmlformats.org/drawingml/2006/main">
-            <a:off x="9810750" y="5010150"/>
-            <a:ext cx="3619500" cy="0"/>
-          </a:xfrm>
-          <a:prstGeom xmlns:a="http://schemas.openxmlformats.org/drawingml/2006/main" prst="line">
-            <a:avLst/>
-          </a:prstGeom>
-          <a:noFill xmlns:a="http://schemas.openxmlformats.org/drawingml/2006/main"/>
-          <a:ln xmlns:a="http://schemas.openxmlformats.org/drawingml/2006/main" w="12700">
-            <a:solidFill>
-              <a:srgbClr val="8DA0B0"/>
-            </a:solidFill>
-            <a:prstDash val="solid"/>
-          </a:ln>
-        </p:spPr>
-        <p:txBody>
-          <a:bodyPr xmlns:a="http://schemas.openxmlformats.org/drawingml/2006/main" wrap="square" lIns="0" tIns="0" rIns="0" bIns="0" anchor="t"/>
-          <a:lstStyle xmlns:a="http://schemas.openxmlformats.org/drawingml/2006/main"/>
-          <a:p xmlns:a="http://schemas.openxmlformats.org/drawingml/2006/main">
-            <a:r>
-              <a:rPr lang="en-US"/>
-              <a:t/>
-            </a:r>
-            <a:endParaRPr lang="en-US"/>
-          </a:p>
-        </p:txBody>
-      </p:sp>
-      <p:sp>
-        <p:nvSpPr>
-          <p:cNvPr id="12" name="table-note-body"/>
-          <p:cNvSpPr txBox="1"/>
-          <p:nvPr/>
-        </p:nvSpPr>
-        <p:spPr>
-          <a:xfrm xmlns:a="http://schemas.openxmlformats.org/drawingml/2006/main">
-            <a:off x="9810750" y="5276850"/>
-            <a:ext cx="3524250" cy="762000"/>
-          </a:xfrm>
-          <a:prstGeom xmlns:a="http://schemas.openxmlformats.org/drawingml/2006/main" prst="rect">
-            <a:avLst/>
-          </a:prstGeom>
-          <a:noFill xmlns:a="http://schemas.openxmlformats.org/drawingml/2006/main"/>
-          <a:ln xmlns:a="http://schemas.openxmlformats.org/drawingml/2006/main" w="0">
-            <a:noFill/>
-          </a:ln>
-        </p:spPr>
-        <p:txBody>
-          <a:bodyPr xmlns:a="http://schemas.openxmlformats.org/drawingml/2006/main" wrap="square" lIns="0" tIns="0" rIns="0" bIns="0" anchor="t"/>
-          <a:lstStyle xmlns:a="http://schemas.openxmlformats.org/drawingml/2006/main"/>
-          <a:p xmlns:a="http://schemas.openxmlformats.org/drawingml/2006/main">
-            <a:r>
-              <a:rPr lang="en-US" sz="1275">
-                <a:solidFill>
-                  <a:srgbClr val="8DA0B0"/>
-                </a:solidFill>
-                <a:latin typeface="Arial"/>
-                <a:ea typeface="Arial"/>
-              </a:rPr>
-              <a:t>Use a table when assumptions and units carry the decision. Charts support the ledger; they do not replace it.</a:t>
-            </a:r>
-            <a:endParaRPr lang="en-US"/>
-          </a:p>
-        </p:txBody>
-      </p:sp>
-      <p:sp>
-        <p:nvSpPr>
           <p:cNvPr id="13" name="source"/>
           <p:cNvSpPr txBox="1"/>
           <p:nvPr/>
@@ -4234,45 +4287,780 @@
           </a:p>
         </p:txBody>
       </p:sp>
-      <p:graphicFrame>
-        <p:nvGraphicFramePr>
-          <p:cNvPr id="8" name="dense-visual-bars"/>
-          <p:cNvGraphicFramePr>
-            <a:graphicFrameLocks xmlns:a="http://schemas.openxmlformats.org/drawingml/2006/main" noGrp="1"/>
-          </p:cNvGraphicFramePr>
-          <p:nvPr/>
-        </p:nvGraphicFramePr>
-        <p:xfrm>
-          <a:off xmlns:a="http://schemas.openxmlformats.org/drawingml/2006/main" x="914400" y="3028950"/>
-          <a:ext xmlns:a="http://schemas.openxmlformats.org/drawingml/2006/main" cx="5334000" cy="3143250"/>
-        </p:xfrm>
-        <a:graphic xmlns:a="http://schemas.openxmlformats.org/drawingml/2006/main">
-          <a:graphicData uri="http://schemas.openxmlformats.org/drawingml/2006/chart">
-            <c:chart xmlns:r="http://schemas.openxmlformats.org/officeDocument/2006/relationships" xmlns:c="http://schemas.openxmlformats.org/drawingml/2006/chart" r:id="Rec1dd6fda84045f9"/>
-          </a:graphicData>
-        </a:graphic>
-      </p:graphicFrame>
-      <p:graphicFrame>
-        <p:nvGraphicFramePr>
-          <p:cNvPr id="9" name="dense-visual-line"/>
-          <p:cNvGraphicFramePr>
-            <a:graphicFrameLocks xmlns:a="http://schemas.openxmlformats.org/drawingml/2006/main" noGrp="1"/>
-          </p:cNvGraphicFramePr>
-          <p:nvPr/>
-        </p:nvGraphicFramePr>
-        <p:xfrm>
-          <a:off xmlns:a="http://schemas.openxmlformats.org/drawingml/2006/main" x="6667500" y="3028950"/>
-          <a:ext xmlns:a="http://schemas.openxmlformats.org/drawingml/2006/main" cx="3810000" cy="3143250"/>
-        </p:xfrm>
-        <a:graphic xmlns:a="http://schemas.openxmlformats.org/drawingml/2006/main">
-          <a:graphicData uri="http://schemas.openxmlformats.org/drawingml/2006/chart">
-            <c:chart xmlns:r="http://schemas.openxmlformats.org/officeDocument/2006/relationships" xmlns:c="http://schemas.openxmlformats.org/drawingml/2006/chart" r:id="R6dc00faa937244fd"/>
-          </a:graphicData>
-        </a:graphic>
-      </p:graphicFrame>
-      <p:sp>
-        <p:nvSpPr>
-          <p:cNvPr id="10" name="visual-note"/>
+      <p:sp>
+        <p:nvSpPr>
+          <p:cNvPr id="8" name="visual-process-rail"/>
+          <p:cNvSpPr/>
+          <p:nvPr/>
+        </p:nvSpPr>
+        <p:spPr>
+          <a:xfrm xmlns:a="http://schemas.openxmlformats.org/drawingml/2006/main">
+            <a:off x="1447800" y="3524250"/>
+            <a:ext cx="0" cy="2647950"/>
+          </a:xfrm>
+          <a:prstGeom xmlns:a="http://schemas.openxmlformats.org/drawingml/2006/main" prst="line">
+            <a:avLst/>
+          </a:prstGeom>
+          <a:noFill xmlns:a="http://schemas.openxmlformats.org/drawingml/2006/main"/>
+          <a:ln xmlns:a="http://schemas.openxmlformats.org/drawingml/2006/main" w="25400">
+            <a:solidFill>
+              <a:srgbClr val="8DA0B0"/>
+            </a:solidFill>
+            <a:prstDash val="solid"/>
+          </a:ln>
+        </p:spPr>
+        <p:txBody>
+          <a:bodyPr xmlns:a="http://schemas.openxmlformats.org/drawingml/2006/main" wrap="square" lIns="0" tIns="0" rIns="0" bIns="0" anchor="t"/>
+          <a:lstStyle xmlns:a="http://schemas.openxmlformats.org/drawingml/2006/main"/>
+          <a:p xmlns:a="http://schemas.openxmlformats.org/drawingml/2006/main">
+            <a:r>
+              <a:rPr lang="en-US"/>
+              <a:t/>
+            </a:r>
+            <a:endParaRPr lang="en-US"/>
+          </a:p>
+        </p:txBody>
+      </p:sp>
+      <p:sp>
+        <p:nvSpPr>
+          <p:cNvPr id="9" name="visual-process-node-0"/>
+          <p:cNvSpPr/>
+          <p:nvPr/>
+        </p:nvSpPr>
+        <p:spPr>
+          <a:xfrm xmlns:a="http://schemas.openxmlformats.org/drawingml/2006/main">
+            <a:off x="1257300" y="3352800"/>
+            <a:ext cx="400050" cy="400050"/>
+          </a:xfrm>
+          <a:prstGeom xmlns:a="http://schemas.openxmlformats.org/drawingml/2006/main" prst="ellipse">
+            <a:avLst/>
+          </a:prstGeom>
+          <a:solidFill xmlns:a="http://schemas.openxmlformats.org/drawingml/2006/main">
+            <a:srgbClr val="FAFCFD"/>
+          </a:solidFill>
+          <a:ln xmlns:a="http://schemas.openxmlformats.org/drawingml/2006/main" w="38100">
+            <a:solidFill>
+              <a:srgbClr val="173D5C"/>
+            </a:solidFill>
+            <a:prstDash val="solid"/>
+          </a:ln>
+        </p:spPr>
+        <p:txBody>
+          <a:bodyPr xmlns:a="http://schemas.openxmlformats.org/drawingml/2006/main" wrap="square" lIns="0" tIns="0" rIns="0" bIns="0" anchor="t"/>
+          <a:lstStyle xmlns:a="http://schemas.openxmlformats.org/drawingml/2006/main"/>
+          <a:p xmlns:a="http://schemas.openxmlformats.org/drawingml/2006/main">
+            <a:r>
+              <a:rPr lang="en-US"/>
+              <a:t/>
+            </a:r>
+            <a:endParaRPr lang="en-US"/>
+          </a:p>
+        </p:txBody>
+      </p:sp>
+      <p:sp>
+        <p:nvSpPr>
+          <p:cNvPr id="10" name="visual-process-number-0"/>
+          <p:cNvSpPr txBox="1"/>
+          <p:nvPr/>
+        </p:nvSpPr>
+        <p:spPr>
+          <a:xfrm xmlns:a="http://schemas.openxmlformats.org/drawingml/2006/main">
+            <a:off x="1238250" y="3467100"/>
+            <a:ext cx="438150" cy="152400"/>
+          </a:xfrm>
+          <a:prstGeom xmlns:a="http://schemas.openxmlformats.org/drawingml/2006/main" prst="rect">
+            <a:avLst/>
+          </a:prstGeom>
+          <a:noFill xmlns:a="http://schemas.openxmlformats.org/drawingml/2006/main"/>
+          <a:ln xmlns:a="http://schemas.openxmlformats.org/drawingml/2006/main" w="0">
+            <a:noFill/>
+          </a:ln>
+        </p:spPr>
+        <p:txBody>
+          <a:bodyPr xmlns:a="http://schemas.openxmlformats.org/drawingml/2006/main" wrap="square" lIns="0" tIns="0" rIns="0" bIns="0" anchor="t"/>
+          <a:lstStyle xmlns:a="http://schemas.openxmlformats.org/drawingml/2006/main"/>
+          <a:p xmlns:a="http://schemas.openxmlformats.org/drawingml/2006/main">
+            <a:pPr algn="ctr"/>
+            <a:r>
+              <a:rPr lang="en-US" sz="900" b="1">
+                <a:solidFill>
+                  <a:srgbClr val="70508F"/>
+                </a:solidFill>
+                <a:latin typeface="Arial"/>
+                <a:ea typeface="Arial"/>
+              </a:rPr>
+              <a:t>01</a:t>
+            </a:r>
+            <a:endParaRPr lang="en-US"/>
+          </a:p>
+        </p:txBody>
+      </p:sp>
+      <p:sp>
+        <p:nvSpPr>
+          <p:cNvPr id="11" name="visual-process-label-0"/>
+          <p:cNvSpPr txBox="1"/>
+          <p:nvPr/>
+        </p:nvSpPr>
+        <p:spPr>
+          <a:xfrm xmlns:a="http://schemas.openxmlformats.org/drawingml/2006/main">
+            <a:off x="1943100" y="3371850"/>
+            <a:ext cx="1714500" cy="228600"/>
+          </a:xfrm>
+          <a:prstGeom xmlns:a="http://schemas.openxmlformats.org/drawingml/2006/main" prst="rect">
+            <a:avLst/>
+          </a:prstGeom>
+          <a:noFill xmlns:a="http://schemas.openxmlformats.org/drawingml/2006/main"/>
+          <a:ln xmlns:a="http://schemas.openxmlformats.org/drawingml/2006/main" w="0">
+            <a:noFill/>
+          </a:ln>
+        </p:spPr>
+        <p:txBody>
+          <a:bodyPr xmlns:a="http://schemas.openxmlformats.org/drawingml/2006/main" wrap="square" lIns="0" tIns="0" rIns="0" bIns="0" anchor="t"/>
+          <a:lstStyle xmlns:a="http://schemas.openxmlformats.org/drawingml/2006/main"/>
+          <a:p xmlns:a="http://schemas.openxmlformats.org/drawingml/2006/main">
+            <a:r>
+              <a:rPr lang="en-US" sz="1650" b="1">
+                <a:solidFill>
+                  <a:srgbClr val="173D5C"/>
+                </a:solidFill>
+                <a:latin typeface="Arial"/>
+                <a:ea typeface="Arial"/>
+              </a:rPr>
+              <a:t>Observe</a:t>
+            </a:r>
+            <a:endParaRPr lang="en-US"/>
+          </a:p>
+        </p:txBody>
+      </p:sp>
+      <p:sp>
+        <p:nvSpPr>
+          <p:cNvPr id="12" name="visual-process-text-0"/>
+          <p:cNvSpPr txBox="1"/>
+          <p:nvPr/>
+        </p:nvSpPr>
+        <p:spPr>
+          <a:xfrm xmlns:a="http://schemas.openxmlformats.org/drawingml/2006/main">
+            <a:off x="3829050" y="3400425"/>
+            <a:ext cx="2476500" cy="228600"/>
+          </a:xfrm>
+          <a:prstGeom xmlns:a="http://schemas.openxmlformats.org/drawingml/2006/main" prst="rect">
+            <a:avLst/>
+          </a:prstGeom>
+          <a:noFill xmlns:a="http://schemas.openxmlformats.org/drawingml/2006/main"/>
+          <a:ln xmlns:a="http://schemas.openxmlformats.org/drawingml/2006/main" w="0">
+            <a:noFill/>
+          </a:ln>
+        </p:spPr>
+        <p:txBody>
+          <a:bodyPr xmlns:a="http://schemas.openxmlformats.org/drawingml/2006/main" wrap="square" lIns="0" tIns="0" rIns="0" bIns="0" anchor="t"/>
+          <a:lstStyle xmlns:a="http://schemas.openxmlformats.org/drawingml/2006/main"/>
+          <a:p xmlns:a="http://schemas.openxmlformats.org/drawingml/2006/main">
+            <a:r>
+              <a:rPr lang="en-US" sz="1275">
+                <a:solidFill>
+                  <a:srgbClr val="8DA0B0"/>
+                </a:solidFill>
+                <a:latin typeface="Arial"/>
+                <a:ea typeface="Arial"/>
+              </a:rPr>
+              <a:t>Find the signal</a:t>
+            </a:r>
+            <a:endParaRPr lang="en-US"/>
+          </a:p>
+        </p:txBody>
+      </p:sp>
+      <p:sp>
+        <p:nvSpPr>
+          <p:cNvPr id="13" name="visual-process-node-1"/>
+          <p:cNvSpPr/>
+          <p:nvPr/>
+        </p:nvSpPr>
+        <p:spPr>
+          <a:xfrm xmlns:a="http://schemas.openxmlformats.org/drawingml/2006/main">
+            <a:off x="1257300" y="4095750"/>
+            <a:ext cx="400050" cy="400050"/>
+          </a:xfrm>
+          <a:prstGeom xmlns:a="http://schemas.openxmlformats.org/drawingml/2006/main" prst="ellipse">
+            <a:avLst/>
+          </a:prstGeom>
+          <a:solidFill xmlns:a="http://schemas.openxmlformats.org/drawingml/2006/main">
+            <a:srgbClr val="FAFCFD"/>
+          </a:solidFill>
+          <a:ln xmlns:a="http://schemas.openxmlformats.org/drawingml/2006/main" w="38100">
+            <a:solidFill>
+              <a:srgbClr val="173D5C"/>
+            </a:solidFill>
+            <a:prstDash val="solid"/>
+          </a:ln>
+        </p:spPr>
+        <p:txBody>
+          <a:bodyPr xmlns:a="http://schemas.openxmlformats.org/drawingml/2006/main" wrap="square" lIns="0" tIns="0" rIns="0" bIns="0" anchor="t"/>
+          <a:lstStyle xmlns:a="http://schemas.openxmlformats.org/drawingml/2006/main"/>
+          <a:p xmlns:a="http://schemas.openxmlformats.org/drawingml/2006/main">
+            <a:r>
+              <a:rPr lang="en-US"/>
+              <a:t/>
+            </a:r>
+            <a:endParaRPr lang="en-US"/>
+          </a:p>
+        </p:txBody>
+      </p:sp>
+      <p:sp>
+        <p:nvSpPr>
+          <p:cNvPr id="14" name="visual-process-number-1"/>
+          <p:cNvSpPr txBox="1"/>
+          <p:nvPr/>
+        </p:nvSpPr>
+        <p:spPr>
+          <a:xfrm xmlns:a="http://schemas.openxmlformats.org/drawingml/2006/main">
+            <a:off x="1238250" y="4210050"/>
+            <a:ext cx="438150" cy="152400"/>
+          </a:xfrm>
+          <a:prstGeom xmlns:a="http://schemas.openxmlformats.org/drawingml/2006/main" prst="rect">
+            <a:avLst/>
+          </a:prstGeom>
+          <a:noFill xmlns:a="http://schemas.openxmlformats.org/drawingml/2006/main"/>
+          <a:ln xmlns:a="http://schemas.openxmlformats.org/drawingml/2006/main" w="0">
+            <a:noFill/>
+          </a:ln>
+        </p:spPr>
+        <p:txBody>
+          <a:bodyPr xmlns:a="http://schemas.openxmlformats.org/drawingml/2006/main" wrap="square" lIns="0" tIns="0" rIns="0" bIns="0" anchor="t"/>
+          <a:lstStyle xmlns:a="http://schemas.openxmlformats.org/drawingml/2006/main"/>
+          <a:p xmlns:a="http://schemas.openxmlformats.org/drawingml/2006/main">
+            <a:pPr algn="ctr"/>
+            <a:r>
+              <a:rPr lang="en-US" sz="900" b="1">
+                <a:solidFill>
+                  <a:srgbClr val="70508F"/>
+                </a:solidFill>
+                <a:latin typeface="Arial"/>
+                <a:ea typeface="Arial"/>
+              </a:rPr>
+              <a:t>02</a:t>
+            </a:r>
+            <a:endParaRPr lang="en-US"/>
+          </a:p>
+        </p:txBody>
+      </p:sp>
+      <p:sp>
+        <p:nvSpPr>
+          <p:cNvPr id="15" name="visual-process-label-1"/>
+          <p:cNvSpPr txBox="1"/>
+          <p:nvPr/>
+        </p:nvSpPr>
+        <p:spPr>
+          <a:xfrm xmlns:a="http://schemas.openxmlformats.org/drawingml/2006/main">
+            <a:off x="1943100" y="4114800"/>
+            <a:ext cx="1714500" cy="228600"/>
+          </a:xfrm>
+          <a:prstGeom xmlns:a="http://schemas.openxmlformats.org/drawingml/2006/main" prst="rect">
+            <a:avLst/>
+          </a:prstGeom>
+          <a:noFill xmlns:a="http://schemas.openxmlformats.org/drawingml/2006/main"/>
+          <a:ln xmlns:a="http://schemas.openxmlformats.org/drawingml/2006/main" w="0">
+            <a:noFill/>
+          </a:ln>
+        </p:spPr>
+        <p:txBody>
+          <a:bodyPr xmlns:a="http://schemas.openxmlformats.org/drawingml/2006/main" wrap="square" lIns="0" tIns="0" rIns="0" bIns="0" anchor="t"/>
+          <a:lstStyle xmlns:a="http://schemas.openxmlformats.org/drawingml/2006/main"/>
+          <a:p xmlns:a="http://schemas.openxmlformats.org/drawingml/2006/main">
+            <a:r>
+              <a:rPr lang="en-US" sz="1650" b="1">
+                <a:solidFill>
+                  <a:srgbClr val="173D5C"/>
+                </a:solidFill>
+                <a:latin typeface="Arial"/>
+                <a:ea typeface="Arial"/>
+              </a:rPr>
+              <a:t>Explain</a:t>
+            </a:r>
+            <a:endParaRPr lang="en-US"/>
+          </a:p>
+        </p:txBody>
+      </p:sp>
+      <p:sp>
+        <p:nvSpPr>
+          <p:cNvPr id="16" name="visual-process-text-1"/>
+          <p:cNvSpPr txBox="1"/>
+          <p:nvPr/>
+        </p:nvSpPr>
+        <p:spPr>
+          <a:xfrm xmlns:a="http://schemas.openxmlformats.org/drawingml/2006/main">
+            <a:off x="3829050" y="4143375"/>
+            <a:ext cx="2476500" cy="228600"/>
+          </a:xfrm>
+          <a:prstGeom xmlns:a="http://schemas.openxmlformats.org/drawingml/2006/main" prst="rect">
+            <a:avLst/>
+          </a:prstGeom>
+          <a:noFill xmlns:a="http://schemas.openxmlformats.org/drawingml/2006/main"/>
+          <a:ln xmlns:a="http://schemas.openxmlformats.org/drawingml/2006/main" w="0">
+            <a:noFill/>
+          </a:ln>
+        </p:spPr>
+        <p:txBody>
+          <a:bodyPr xmlns:a="http://schemas.openxmlformats.org/drawingml/2006/main" wrap="square" lIns="0" tIns="0" rIns="0" bIns="0" anchor="t"/>
+          <a:lstStyle xmlns:a="http://schemas.openxmlformats.org/drawingml/2006/main"/>
+          <a:p xmlns:a="http://schemas.openxmlformats.org/drawingml/2006/main">
+            <a:r>
+              <a:rPr lang="en-US" sz="1275">
+                <a:solidFill>
+                  <a:srgbClr val="8DA0B0"/>
+                </a:solidFill>
+                <a:latin typeface="Arial"/>
+                <a:ea typeface="Arial"/>
+              </a:rPr>
+              <a:t>Name the mechanism</a:t>
+            </a:r>
+            <a:endParaRPr lang="en-US"/>
+          </a:p>
+        </p:txBody>
+      </p:sp>
+      <p:sp>
+        <p:nvSpPr>
+          <p:cNvPr id="17" name="visual-process-node-2"/>
+          <p:cNvSpPr/>
+          <p:nvPr/>
+        </p:nvSpPr>
+        <p:spPr>
+          <a:xfrm xmlns:a="http://schemas.openxmlformats.org/drawingml/2006/main">
+            <a:off x="1257300" y="4838700"/>
+            <a:ext cx="400050" cy="400050"/>
+          </a:xfrm>
+          <a:prstGeom xmlns:a="http://schemas.openxmlformats.org/drawingml/2006/main" prst="ellipse">
+            <a:avLst/>
+          </a:prstGeom>
+          <a:solidFill xmlns:a="http://schemas.openxmlformats.org/drawingml/2006/main">
+            <a:srgbClr val="FAFCFD"/>
+          </a:solidFill>
+          <a:ln xmlns:a="http://schemas.openxmlformats.org/drawingml/2006/main" w="38100">
+            <a:solidFill>
+              <a:srgbClr val="173D5C"/>
+            </a:solidFill>
+            <a:prstDash val="solid"/>
+          </a:ln>
+        </p:spPr>
+        <p:txBody>
+          <a:bodyPr xmlns:a="http://schemas.openxmlformats.org/drawingml/2006/main" wrap="square" lIns="0" tIns="0" rIns="0" bIns="0" anchor="t"/>
+          <a:lstStyle xmlns:a="http://schemas.openxmlformats.org/drawingml/2006/main"/>
+          <a:p xmlns:a="http://schemas.openxmlformats.org/drawingml/2006/main">
+            <a:r>
+              <a:rPr lang="en-US"/>
+              <a:t/>
+            </a:r>
+            <a:endParaRPr lang="en-US"/>
+          </a:p>
+        </p:txBody>
+      </p:sp>
+      <p:sp>
+        <p:nvSpPr>
+          <p:cNvPr id="18" name="visual-process-number-2"/>
+          <p:cNvSpPr txBox="1"/>
+          <p:nvPr/>
+        </p:nvSpPr>
+        <p:spPr>
+          <a:xfrm xmlns:a="http://schemas.openxmlformats.org/drawingml/2006/main">
+            <a:off x="1238250" y="4953000"/>
+            <a:ext cx="438150" cy="152400"/>
+          </a:xfrm>
+          <a:prstGeom xmlns:a="http://schemas.openxmlformats.org/drawingml/2006/main" prst="rect">
+            <a:avLst/>
+          </a:prstGeom>
+          <a:noFill xmlns:a="http://schemas.openxmlformats.org/drawingml/2006/main"/>
+          <a:ln xmlns:a="http://schemas.openxmlformats.org/drawingml/2006/main" w="0">
+            <a:noFill/>
+          </a:ln>
+        </p:spPr>
+        <p:txBody>
+          <a:bodyPr xmlns:a="http://schemas.openxmlformats.org/drawingml/2006/main" wrap="square" lIns="0" tIns="0" rIns="0" bIns="0" anchor="t"/>
+          <a:lstStyle xmlns:a="http://schemas.openxmlformats.org/drawingml/2006/main"/>
+          <a:p xmlns:a="http://schemas.openxmlformats.org/drawingml/2006/main">
+            <a:pPr algn="ctr"/>
+            <a:r>
+              <a:rPr lang="en-US" sz="900" b="1">
+                <a:solidFill>
+                  <a:srgbClr val="70508F"/>
+                </a:solidFill>
+                <a:latin typeface="Arial"/>
+                <a:ea typeface="Arial"/>
+              </a:rPr>
+              <a:t>03</a:t>
+            </a:r>
+            <a:endParaRPr lang="en-US"/>
+          </a:p>
+        </p:txBody>
+      </p:sp>
+      <p:sp>
+        <p:nvSpPr>
+          <p:cNvPr id="19" name="visual-process-label-2"/>
+          <p:cNvSpPr txBox="1"/>
+          <p:nvPr/>
+        </p:nvSpPr>
+        <p:spPr>
+          <a:xfrm xmlns:a="http://schemas.openxmlformats.org/drawingml/2006/main">
+            <a:off x="1943100" y="4857750"/>
+            <a:ext cx="1714500" cy="228600"/>
+          </a:xfrm>
+          <a:prstGeom xmlns:a="http://schemas.openxmlformats.org/drawingml/2006/main" prst="rect">
+            <a:avLst/>
+          </a:prstGeom>
+          <a:noFill xmlns:a="http://schemas.openxmlformats.org/drawingml/2006/main"/>
+          <a:ln xmlns:a="http://schemas.openxmlformats.org/drawingml/2006/main" w="0">
+            <a:noFill/>
+          </a:ln>
+        </p:spPr>
+        <p:txBody>
+          <a:bodyPr xmlns:a="http://schemas.openxmlformats.org/drawingml/2006/main" wrap="square" lIns="0" tIns="0" rIns="0" bIns="0" anchor="t"/>
+          <a:lstStyle xmlns:a="http://schemas.openxmlformats.org/drawingml/2006/main"/>
+          <a:p xmlns:a="http://schemas.openxmlformats.org/drawingml/2006/main">
+            <a:r>
+              <a:rPr lang="en-US" sz="1650" b="1">
+                <a:solidFill>
+                  <a:srgbClr val="173D5C"/>
+                </a:solidFill>
+                <a:latin typeface="Arial"/>
+                <a:ea typeface="Arial"/>
+              </a:rPr>
+              <a:t>Choose</a:t>
+            </a:r>
+            <a:endParaRPr lang="en-US"/>
+          </a:p>
+        </p:txBody>
+      </p:sp>
+      <p:sp>
+        <p:nvSpPr>
+          <p:cNvPr id="20" name="visual-process-text-2"/>
+          <p:cNvSpPr txBox="1"/>
+          <p:nvPr/>
+        </p:nvSpPr>
+        <p:spPr>
+          <a:xfrm xmlns:a="http://schemas.openxmlformats.org/drawingml/2006/main">
+            <a:off x="3829050" y="4886325"/>
+            <a:ext cx="2476500" cy="228600"/>
+          </a:xfrm>
+          <a:prstGeom xmlns:a="http://schemas.openxmlformats.org/drawingml/2006/main" prst="rect">
+            <a:avLst/>
+          </a:prstGeom>
+          <a:noFill xmlns:a="http://schemas.openxmlformats.org/drawingml/2006/main"/>
+          <a:ln xmlns:a="http://schemas.openxmlformats.org/drawingml/2006/main" w="0">
+            <a:noFill/>
+          </a:ln>
+        </p:spPr>
+        <p:txBody>
+          <a:bodyPr xmlns:a="http://schemas.openxmlformats.org/drawingml/2006/main" wrap="square" lIns="0" tIns="0" rIns="0" bIns="0" anchor="t"/>
+          <a:lstStyle xmlns:a="http://schemas.openxmlformats.org/drawingml/2006/main"/>
+          <a:p xmlns:a="http://schemas.openxmlformats.org/drawingml/2006/main">
+            <a:r>
+              <a:rPr lang="en-US" sz="1275">
+                <a:solidFill>
+                  <a:srgbClr val="8DA0B0"/>
+                </a:solidFill>
+                <a:latin typeface="Arial"/>
+                <a:ea typeface="Arial"/>
+              </a:rPr>
+              <a:t>Set the condition</a:t>
+            </a:r>
+            <a:endParaRPr lang="en-US"/>
+          </a:p>
+        </p:txBody>
+      </p:sp>
+      <p:sp>
+        <p:nvSpPr>
+          <p:cNvPr id="21" name="visual-process-node-3"/>
+          <p:cNvSpPr/>
+          <p:nvPr/>
+        </p:nvSpPr>
+        <p:spPr>
+          <a:xfrm xmlns:a="http://schemas.openxmlformats.org/drawingml/2006/main">
+            <a:off x="1257300" y="5581650"/>
+            <a:ext cx="400050" cy="400050"/>
+          </a:xfrm>
+          <a:prstGeom xmlns:a="http://schemas.openxmlformats.org/drawingml/2006/main" prst="ellipse">
+            <a:avLst/>
+          </a:prstGeom>
+          <a:solidFill xmlns:a="http://schemas.openxmlformats.org/drawingml/2006/main">
+            <a:srgbClr val="70508F"/>
+          </a:solidFill>
+          <a:ln xmlns:a="http://schemas.openxmlformats.org/drawingml/2006/main" w="38100">
+            <a:solidFill>
+              <a:srgbClr val="70508F"/>
+            </a:solidFill>
+            <a:prstDash val="solid"/>
+          </a:ln>
+        </p:spPr>
+        <p:txBody>
+          <a:bodyPr xmlns:a="http://schemas.openxmlformats.org/drawingml/2006/main" wrap="square" lIns="0" tIns="0" rIns="0" bIns="0" anchor="t"/>
+          <a:lstStyle xmlns:a="http://schemas.openxmlformats.org/drawingml/2006/main"/>
+          <a:p xmlns:a="http://schemas.openxmlformats.org/drawingml/2006/main">
+            <a:r>
+              <a:rPr lang="en-US"/>
+              <a:t/>
+            </a:r>
+            <a:endParaRPr lang="en-US"/>
+          </a:p>
+        </p:txBody>
+      </p:sp>
+      <p:sp>
+        <p:nvSpPr>
+          <p:cNvPr id="22" name="visual-process-number-3"/>
+          <p:cNvSpPr txBox="1"/>
+          <p:nvPr/>
+        </p:nvSpPr>
+        <p:spPr>
+          <a:xfrm xmlns:a="http://schemas.openxmlformats.org/drawingml/2006/main">
+            <a:off x="1238250" y="5695950"/>
+            <a:ext cx="438150" cy="152400"/>
+          </a:xfrm>
+          <a:prstGeom xmlns:a="http://schemas.openxmlformats.org/drawingml/2006/main" prst="rect">
+            <a:avLst/>
+          </a:prstGeom>
+          <a:noFill xmlns:a="http://schemas.openxmlformats.org/drawingml/2006/main"/>
+          <a:ln xmlns:a="http://schemas.openxmlformats.org/drawingml/2006/main" w="0">
+            <a:noFill/>
+          </a:ln>
+        </p:spPr>
+        <p:txBody>
+          <a:bodyPr xmlns:a="http://schemas.openxmlformats.org/drawingml/2006/main" wrap="square" lIns="0" tIns="0" rIns="0" bIns="0" anchor="t"/>
+          <a:lstStyle xmlns:a="http://schemas.openxmlformats.org/drawingml/2006/main"/>
+          <a:p xmlns:a="http://schemas.openxmlformats.org/drawingml/2006/main">
+            <a:pPr algn="ctr"/>
+            <a:r>
+              <a:rPr lang="en-US" sz="900" b="1">
+                <a:solidFill>
+                  <a:srgbClr val="FFFFFF"/>
+                </a:solidFill>
+                <a:latin typeface="Arial"/>
+                <a:ea typeface="Arial"/>
+              </a:rPr>
+              <a:t>04</a:t>
+            </a:r>
+            <a:endParaRPr lang="en-US"/>
+          </a:p>
+        </p:txBody>
+      </p:sp>
+      <p:sp>
+        <p:nvSpPr>
+          <p:cNvPr id="23" name="visual-process-label-3"/>
+          <p:cNvSpPr txBox="1"/>
+          <p:nvPr/>
+        </p:nvSpPr>
+        <p:spPr>
+          <a:xfrm xmlns:a="http://schemas.openxmlformats.org/drawingml/2006/main">
+            <a:off x="1943100" y="5600700"/>
+            <a:ext cx="1714500" cy="228600"/>
+          </a:xfrm>
+          <a:prstGeom xmlns:a="http://schemas.openxmlformats.org/drawingml/2006/main" prst="rect">
+            <a:avLst/>
+          </a:prstGeom>
+          <a:noFill xmlns:a="http://schemas.openxmlformats.org/drawingml/2006/main"/>
+          <a:ln xmlns:a="http://schemas.openxmlformats.org/drawingml/2006/main" w="0">
+            <a:noFill/>
+          </a:ln>
+        </p:spPr>
+        <p:txBody>
+          <a:bodyPr xmlns:a="http://schemas.openxmlformats.org/drawingml/2006/main" wrap="square" lIns="0" tIns="0" rIns="0" bIns="0" anchor="t"/>
+          <a:lstStyle xmlns:a="http://schemas.openxmlformats.org/drawingml/2006/main"/>
+          <a:p xmlns:a="http://schemas.openxmlformats.org/drawingml/2006/main">
+            <a:r>
+              <a:rPr lang="en-US" sz="1650" b="1">
+                <a:solidFill>
+                  <a:srgbClr val="173D5C"/>
+                </a:solidFill>
+                <a:latin typeface="Arial"/>
+                <a:ea typeface="Arial"/>
+              </a:rPr>
+              <a:t>Act</a:t>
+            </a:r>
+            <a:endParaRPr lang="en-US"/>
+          </a:p>
+        </p:txBody>
+      </p:sp>
+      <p:sp>
+        <p:nvSpPr>
+          <p:cNvPr id="24" name="visual-process-text-3"/>
+          <p:cNvSpPr txBox="1"/>
+          <p:nvPr/>
+        </p:nvSpPr>
+        <p:spPr>
+          <a:xfrm xmlns:a="http://schemas.openxmlformats.org/drawingml/2006/main">
+            <a:off x="3829050" y="5629275"/>
+            <a:ext cx="2476500" cy="228600"/>
+          </a:xfrm>
+          <a:prstGeom xmlns:a="http://schemas.openxmlformats.org/drawingml/2006/main" prst="rect">
+            <a:avLst/>
+          </a:prstGeom>
+          <a:noFill xmlns:a="http://schemas.openxmlformats.org/drawingml/2006/main"/>
+          <a:ln xmlns:a="http://schemas.openxmlformats.org/drawingml/2006/main" w="0">
+            <a:noFill/>
+          </a:ln>
+        </p:spPr>
+        <p:txBody>
+          <a:bodyPr xmlns:a="http://schemas.openxmlformats.org/drawingml/2006/main" wrap="square" lIns="0" tIns="0" rIns="0" bIns="0" anchor="t"/>
+          <a:lstStyle xmlns:a="http://schemas.openxmlformats.org/drawingml/2006/main"/>
+          <a:p xmlns:a="http://schemas.openxmlformats.org/drawingml/2006/main">
+            <a:r>
+              <a:rPr lang="en-US" sz="1275">
+                <a:solidFill>
+                  <a:srgbClr val="8DA0B0"/>
+                </a:solidFill>
+                <a:latin typeface="Arial"/>
+                <a:ea typeface="Arial"/>
+              </a:rPr>
+              <a:t>Return with proof</a:t>
+            </a:r>
+            <a:endParaRPr lang="en-US"/>
+          </a:p>
+        </p:txBody>
+      </p:sp>
+      <p:sp>
+        <p:nvSpPr>
+          <p:cNvPr id="25" name="visual-process-rule"/>
+          <p:cNvSpPr/>
+          <p:nvPr/>
+        </p:nvSpPr>
+        <p:spPr>
+          <a:xfrm xmlns:a="http://schemas.openxmlformats.org/drawingml/2006/main">
+            <a:off x="7239000" y="3486150"/>
+            <a:ext cx="0" cy="2705100"/>
+          </a:xfrm>
+          <a:prstGeom xmlns:a="http://schemas.openxmlformats.org/drawingml/2006/main" prst="line">
+            <a:avLst/>
+          </a:prstGeom>
+          <a:noFill xmlns:a="http://schemas.openxmlformats.org/drawingml/2006/main"/>
+          <a:ln xmlns:a="http://schemas.openxmlformats.org/drawingml/2006/main" w="12700">
+            <a:solidFill>
+              <a:srgbClr val="8DA0B0"/>
+            </a:solidFill>
+            <a:prstDash val="solid"/>
+          </a:ln>
+        </p:spPr>
+        <p:txBody>
+          <a:bodyPr xmlns:a="http://schemas.openxmlformats.org/drawingml/2006/main" wrap="square" lIns="0" tIns="0" rIns="0" bIns="0" anchor="t"/>
+          <a:lstStyle xmlns:a="http://schemas.openxmlformats.org/drawingml/2006/main"/>
+          <a:p xmlns:a="http://schemas.openxmlformats.org/drawingml/2006/main">
+            <a:r>
+              <a:rPr lang="en-US"/>
+              <a:t/>
+            </a:r>
+            <a:endParaRPr lang="en-US"/>
+          </a:p>
+        </p:txBody>
+      </p:sp>
+      <p:sp>
+        <p:nvSpPr>
+          <p:cNvPr id="26" name="visual-process-note-label"/>
+          <p:cNvSpPr txBox="1"/>
+          <p:nvPr/>
+        </p:nvSpPr>
+        <p:spPr>
+          <a:xfrm xmlns:a="http://schemas.openxmlformats.org/drawingml/2006/main">
+            <a:off x="8001000" y="3562350"/>
+            <a:ext cx="3429000" cy="228600"/>
+          </a:xfrm>
+          <a:prstGeom xmlns:a="http://schemas.openxmlformats.org/drawingml/2006/main" prst="rect">
+            <a:avLst/>
+          </a:prstGeom>
+          <a:noFill xmlns:a="http://schemas.openxmlformats.org/drawingml/2006/main"/>
+          <a:ln xmlns:a="http://schemas.openxmlformats.org/drawingml/2006/main" w="0">
+            <a:noFill/>
+          </a:ln>
+        </p:spPr>
+        <p:txBody>
+          <a:bodyPr xmlns:a="http://schemas.openxmlformats.org/drawingml/2006/main" wrap="square" lIns="0" tIns="0" rIns="0" bIns="0" anchor="t"/>
+          <a:lstStyle xmlns:a="http://schemas.openxmlformats.org/drawingml/2006/main"/>
+          <a:p xmlns:a="http://schemas.openxmlformats.org/drawingml/2006/main">
+            <a:r>
+              <a:rPr lang="en-US" sz="1125" b="1">
+                <a:solidFill>
+                  <a:srgbClr val="70508F"/>
+                </a:solidFill>
+                <a:latin typeface="Arial"/>
+                <a:ea typeface="Arial"/>
+              </a:rPr>
+              <a:t>PROCESS CARRIER</a:t>
+            </a:r>
+            <a:endParaRPr lang="en-US"/>
+          </a:p>
+        </p:txBody>
+      </p:sp>
+      <p:sp>
+        <p:nvSpPr>
+          <p:cNvPr id="27" name="visual-process-note-title"/>
+          <p:cNvSpPr txBox="1"/>
+          <p:nvPr/>
+        </p:nvSpPr>
+        <p:spPr>
+          <a:xfrm xmlns:a="http://schemas.openxmlformats.org/drawingml/2006/main">
+            <a:off x="8001000" y="4038600"/>
+            <a:ext cx="4381500" cy="685800"/>
+          </a:xfrm>
+          <a:prstGeom xmlns:a="http://schemas.openxmlformats.org/drawingml/2006/main" prst="rect">
+            <a:avLst/>
+          </a:prstGeom>
+          <a:noFill xmlns:a="http://schemas.openxmlformats.org/drawingml/2006/main"/>
+          <a:ln xmlns:a="http://schemas.openxmlformats.org/drawingml/2006/main" w="0">
+            <a:noFill/>
+          </a:ln>
+        </p:spPr>
+        <p:txBody>
+          <a:bodyPr xmlns:a="http://schemas.openxmlformats.org/drawingml/2006/main" wrap="square" lIns="0" tIns="0" rIns="0" bIns="0" anchor="t"/>
+          <a:lstStyle xmlns:a="http://schemas.openxmlformats.org/drawingml/2006/main"/>
+          <a:p xmlns:a="http://schemas.openxmlformats.org/drawingml/2006/main">
+            <a:r>
+              <a:rPr lang="en-US" sz="2250" b="1">
+                <a:solidFill>
+                  <a:srgbClr val="173D5C"/>
+                </a:solidFill>
+                <a:latin typeface="Arial"/>
+                <a:ea typeface="Arial"/>
+              </a:rPr>
+              <a:t>A relationship earns a line.</a:t>
+            </a:r>
+            <a:endParaRPr lang="en-US"/>
+          </a:p>
+        </p:txBody>
+      </p:sp>
+      <p:sp>
+        <p:nvSpPr>
+          <p:cNvPr id="28" name="visual-process-note-body"/>
+          <p:cNvSpPr txBox="1"/>
+          <p:nvPr/>
+        </p:nvSpPr>
+        <p:spPr>
+          <a:xfrm xmlns:a="http://schemas.openxmlformats.org/drawingml/2006/main">
+            <a:off x="8001000" y="5048250"/>
+            <a:ext cx="4572000" cy="685800"/>
+          </a:xfrm>
+          <a:prstGeom xmlns:a="http://schemas.openxmlformats.org/drawingml/2006/main" prst="rect">
+            <a:avLst/>
+          </a:prstGeom>
+          <a:noFill xmlns:a="http://schemas.openxmlformats.org/drawingml/2006/main"/>
+          <a:ln xmlns:a="http://schemas.openxmlformats.org/drawingml/2006/main" w="0">
+            <a:noFill/>
+          </a:ln>
+        </p:spPr>
+        <p:txBody>
+          <a:bodyPr xmlns:a="http://schemas.openxmlformats.org/drawingml/2006/main" wrap="square" lIns="0" tIns="0" rIns="0" bIns="0" anchor="t"/>
+          <a:lstStyle xmlns:a="http://schemas.openxmlformats.org/drawingml/2006/main"/>
+          <a:p xmlns:a="http://schemas.openxmlformats.org/drawingml/2006/main">
+            <a:r>
+              <a:rPr lang="en-US" sz="1275">
+                <a:solidFill>
+                  <a:srgbClr val="8DA0B0"/>
+                </a:solidFill>
+                <a:latin typeface="Arial"/>
+                <a:ea typeface="Arial"/>
+              </a:rPr>
+              <a:t>Use sequence, direction and conditions to make the mechanism visible. If the relationship is not real, remove the arrow.</a:t>
+            </a:r>
+            <a:endParaRPr lang="en-US"/>
+          </a:p>
+        </p:txBody>
+      </p:sp>
+      <p:sp>
+        <p:nvSpPr>
+          <p:cNvPr id="29" name="visual-note"/>
           <p:cNvSpPr/>
           <p:nvPr/>
         </p:nvSpPr>
@@ -4308,7 +5096,7 @@
       </p:sp>
       <p:sp>
         <p:nvSpPr>
-          <p:cNvPr id="11" name="visual-note-label"/>
+          <p:cNvPr id="30" name="visual-note-label"/>
           <p:cNvSpPr txBox="1"/>
           <p:nvPr/>
         </p:nvSpPr>
@@ -4345,7 +5133,7 @@
       </p:sp>
       <p:sp>
         <p:nvSpPr>
-          <p:cNvPr id="12" name="visual-note-text"/>
+          <p:cNvPr id="31" name="visual-note-text"/>
           <p:cNvSpPr txBox="1"/>
           <p:nvPr/>
         </p:nvSpPr>
@@ -4382,7 +5170,7 @@
       </p:sp>
       <p:sp>
         <p:nvSpPr>
-          <p:cNvPr id="13" name="visual-note-foot"/>
+          <p:cNvPr id="32" name="visual-note-foot"/>
           <p:cNvSpPr txBox="1"/>
           <p:nvPr/>
         </p:nvSpPr>
@@ -4419,7 +5207,7 @@
       </p:sp>
       <p:sp>
         <p:nvSpPr>
-          <p:cNvPr id="14" name="source"/>
+          <p:cNvPr id="33" name="source"/>
           <p:cNvSpPr txBox="1"/>
           <p:nvPr/>
         </p:nvSpPr>
@@ -4456,7 +5244,7 @@
       </p:sp>
       <p:sp>
         <p:nvSpPr>
-          <p:cNvPr id="15" name="page-number"/>
+          <p:cNvPr id="34" name="page-number"/>
           <p:cNvSpPr txBox="1"/>
           <p:nvPr/>
         </p:nvSpPr>
